--- a/figure/科研.pptx
+++ b/figure/科研.pptx
@@ -5,7 +5,7 @@
     <p:sldMasterId id="2147483648" r:id="rId1"/>
   </p:sldMasterIdLst>
   <p:notesMasterIdLst>
-    <p:notesMasterId r:id="rId16"/>
+    <p:notesMasterId r:id="rId18"/>
   </p:notesMasterIdLst>
   <p:sldIdLst>
     <p:sldId id="256" r:id="rId2"/>
@@ -16,12 +16,14 @@
     <p:sldId id="259" r:id="rId7"/>
     <p:sldId id="264" r:id="rId8"/>
     <p:sldId id="272" r:id="rId9"/>
-    <p:sldId id="260" r:id="rId10"/>
-    <p:sldId id="261" r:id="rId11"/>
-    <p:sldId id="266" r:id="rId12"/>
-    <p:sldId id="262" r:id="rId13"/>
-    <p:sldId id="263" r:id="rId14"/>
-    <p:sldId id="265" r:id="rId15"/>
+    <p:sldId id="273" r:id="rId10"/>
+    <p:sldId id="260" r:id="rId11"/>
+    <p:sldId id="261" r:id="rId12"/>
+    <p:sldId id="266" r:id="rId13"/>
+    <p:sldId id="262" r:id="rId14"/>
+    <p:sldId id="263" r:id="rId15"/>
+    <p:sldId id="265" r:id="rId16"/>
+    <p:sldId id="274" r:id="rId17"/>
   </p:sldIdLst>
   <p:sldSz cx="12192000" cy="6858000"/>
   <p:notesSz cx="6858000" cy="9144000"/>
@@ -210,7 +212,7 @@
           <a:p>
             <a:fld id="{B2743333-EF98-4F3C-95C6-7F4B81769F11}" type="datetimeFigureOut">
               <a:rPr lang="zh-CN" altLang="en-US" smtClean="0"/>
-              <a:t>2023/12/7</a:t>
+              <a:t>2023/12/8</a:t>
             </a:fld>
             <a:endParaRPr lang="zh-CN" altLang="en-US"/>
           </a:p>
@@ -777,7 +779,7 @@
           <a:p>
             <a:fld id="{7FB516F4-0452-4179-9B91-2B7430FA9247}" type="datetimeFigureOut">
               <a:rPr lang="zh-CN" altLang="en-US" smtClean="0"/>
-              <a:t>2023/12/7</a:t>
+              <a:t>2023/12/8</a:t>
             </a:fld>
             <a:endParaRPr lang="zh-CN" altLang="en-US"/>
           </a:p>
@@ -947,7 +949,7 @@
           <a:p>
             <a:fld id="{7FB516F4-0452-4179-9B91-2B7430FA9247}" type="datetimeFigureOut">
               <a:rPr lang="zh-CN" altLang="en-US" smtClean="0"/>
-              <a:t>2023/12/7</a:t>
+              <a:t>2023/12/8</a:t>
             </a:fld>
             <a:endParaRPr lang="zh-CN" altLang="en-US"/>
           </a:p>
@@ -1127,7 +1129,7 @@
           <a:p>
             <a:fld id="{7FB516F4-0452-4179-9B91-2B7430FA9247}" type="datetimeFigureOut">
               <a:rPr lang="zh-CN" altLang="en-US" smtClean="0"/>
-              <a:t>2023/12/7</a:t>
+              <a:t>2023/12/8</a:t>
             </a:fld>
             <a:endParaRPr lang="zh-CN" altLang="en-US"/>
           </a:p>
@@ -1297,7 +1299,7 @@
           <a:p>
             <a:fld id="{7FB516F4-0452-4179-9B91-2B7430FA9247}" type="datetimeFigureOut">
               <a:rPr lang="zh-CN" altLang="en-US" smtClean="0"/>
-              <a:t>2023/12/7</a:t>
+              <a:t>2023/12/8</a:t>
             </a:fld>
             <a:endParaRPr lang="zh-CN" altLang="en-US"/>
           </a:p>
@@ -1543,7 +1545,7 @@
           <a:p>
             <a:fld id="{7FB516F4-0452-4179-9B91-2B7430FA9247}" type="datetimeFigureOut">
               <a:rPr lang="zh-CN" altLang="en-US" smtClean="0"/>
-              <a:t>2023/12/7</a:t>
+              <a:t>2023/12/8</a:t>
             </a:fld>
             <a:endParaRPr lang="zh-CN" altLang="en-US"/>
           </a:p>
@@ -1775,7 +1777,7 @@
           <a:p>
             <a:fld id="{7FB516F4-0452-4179-9B91-2B7430FA9247}" type="datetimeFigureOut">
               <a:rPr lang="zh-CN" altLang="en-US" smtClean="0"/>
-              <a:t>2023/12/7</a:t>
+              <a:t>2023/12/8</a:t>
             </a:fld>
             <a:endParaRPr lang="zh-CN" altLang="en-US"/>
           </a:p>
@@ -2142,7 +2144,7 @@
           <a:p>
             <a:fld id="{7FB516F4-0452-4179-9B91-2B7430FA9247}" type="datetimeFigureOut">
               <a:rPr lang="zh-CN" altLang="en-US" smtClean="0"/>
-              <a:t>2023/12/7</a:t>
+              <a:t>2023/12/8</a:t>
             </a:fld>
             <a:endParaRPr lang="zh-CN" altLang="en-US"/>
           </a:p>
@@ -2260,7 +2262,7 @@
           <a:p>
             <a:fld id="{7FB516F4-0452-4179-9B91-2B7430FA9247}" type="datetimeFigureOut">
               <a:rPr lang="zh-CN" altLang="en-US" smtClean="0"/>
-              <a:t>2023/12/7</a:t>
+              <a:t>2023/12/8</a:t>
             </a:fld>
             <a:endParaRPr lang="zh-CN" altLang="en-US"/>
           </a:p>
@@ -2355,7 +2357,7 @@
           <a:p>
             <a:fld id="{7FB516F4-0452-4179-9B91-2B7430FA9247}" type="datetimeFigureOut">
               <a:rPr lang="zh-CN" altLang="en-US" smtClean="0"/>
-              <a:t>2023/12/7</a:t>
+              <a:t>2023/12/8</a:t>
             </a:fld>
             <a:endParaRPr lang="zh-CN" altLang="en-US"/>
           </a:p>
@@ -2632,7 +2634,7 @@
           <a:p>
             <a:fld id="{7FB516F4-0452-4179-9B91-2B7430FA9247}" type="datetimeFigureOut">
               <a:rPr lang="zh-CN" altLang="en-US" smtClean="0"/>
-              <a:t>2023/12/7</a:t>
+              <a:t>2023/12/8</a:t>
             </a:fld>
             <a:endParaRPr lang="zh-CN" altLang="en-US"/>
           </a:p>
@@ -2885,7 +2887,7 @@
           <a:p>
             <a:fld id="{7FB516F4-0452-4179-9B91-2B7430FA9247}" type="datetimeFigureOut">
               <a:rPr lang="zh-CN" altLang="en-US" smtClean="0"/>
-              <a:t>2023/12/7</a:t>
+              <a:t>2023/12/8</a:t>
             </a:fld>
             <a:endParaRPr lang="zh-CN" altLang="en-US"/>
           </a:p>
@@ -3098,7 +3100,7 @@
           <a:p>
             <a:fld id="{7FB516F4-0452-4179-9B91-2B7430FA9247}" type="datetimeFigureOut">
               <a:rPr lang="zh-CN" altLang="en-US" smtClean="0"/>
-              <a:t>2023/12/7</a:t>
+              <a:t>2023/12/8</a:t>
             </a:fld>
             <a:endParaRPr lang="zh-CN" altLang="en-US"/>
           </a:p>
@@ -4824,6 +4826,1398 @@
       </p:grpSpPr>
       <p:grpSp>
         <p:nvGrpSpPr>
+          <p:cNvPr id="52" name="组合 51"/>
+          <p:cNvGrpSpPr/>
+          <p:nvPr/>
+        </p:nvGrpSpPr>
+        <p:grpSpPr>
+          <a:xfrm>
+            <a:off x="933061" y="2412766"/>
+            <a:ext cx="7487370" cy="3739211"/>
+            <a:chOff x="933061" y="2412766"/>
+            <a:chExt cx="7487370" cy="3739211"/>
+          </a:xfrm>
+        </p:grpSpPr>
+        <p:sp>
+          <p:nvSpPr>
+            <p:cNvPr id="27" name="矩形 26"/>
+            <p:cNvSpPr/>
+            <p:nvPr/>
+          </p:nvSpPr>
+          <p:spPr>
+            <a:xfrm>
+              <a:off x="1876565" y="3175582"/>
+              <a:ext cx="1107054" cy="411856"/>
+            </a:xfrm>
+            <a:prstGeom prst="rect">
+              <a:avLst/>
+            </a:prstGeom>
+            <a:noFill/>
+            <a:ln w="19050">
+              <a:solidFill>
+                <a:schemeClr val="tx1"/>
+              </a:solidFill>
+            </a:ln>
+          </p:spPr>
+          <p:style>
+            <a:lnRef idx="2">
+              <a:schemeClr val="accent1">
+                <a:shade val="50000"/>
+              </a:schemeClr>
+            </a:lnRef>
+            <a:fillRef idx="1">
+              <a:schemeClr val="accent1"/>
+            </a:fillRef>
+            <a:effectRef idx="0">
+              <a:schemeClr val="accent1"/>
+            </a:effectRef>
+            <a:fontRef idx="minor">
+              <a:schemeClr val="lt1"/>
+            </a:fontRef>
+          </p:style>
+          <p:txBody>
+            <a:bodyPr rtlCol="0" anchor="ctr"/>
+            <a:lstStyle/>
+            <a:p>
+              <a:pPr algn="ctr"/>
+              <a:r>
+                <a:rPr lang="zh-CN" altLang="en-US" sz="1600" b="1" dirty="0" smtClean="0">
+                  <a:solidFill>
+                    <a:schemeClr val="tx1"/>
+                  </a:solidFill>
+                </a:rPr>
+                <a:t>网络种群</a:t>
+              </a:r>
+              <a:endParaRPr lang="zh-CN" altLang="en-US" sz="1600" b="1" dirty="0">
+                <a:solidFill>
+                  <a:schemeClr val="tx1"/>
+                </a:solidFill>
+              </a:endParaRPr>
+            </a:p>
+          </p:txBody>
+        </p:sp>
+        <p:sp>
+          <p:nvSpPr>
+            <p:cNvPr id="28" name="矩形 27"/>
+            <p:cNvSpPr/>
+            <p:nvPr/>
+          </p:nvSpPr>
+          <p:spPr>
+            <a:xfrm>
+              <a:off x="1893178" y="3975752"/>
+              <a:ext cx="1090441" cy="388761"/>
+            </a:xfrm>
+            <a:prstGeom prst="rect">
+              <a:avLst/>
+            </a:prstGeom>
+            <a:noFill/>
+            <a:ln w="19050">
+              <a:solidFill>
+                <a:schemeClr val="tx1"/>
+              </a:solidFill>
+            </a:ln>
+          </p:spPr>
+          <p:style>
+            <a:lnRef idx="2">
+              <a:schemeClr val="accent1">
+                <a:shade val="50000"/>
+              </a:schemeClr>
+            </a:lnRef>
+            <a:fillRef idx="1">
+              <a:schemeClr val="accent1"/>
+            </a:fillRef>
+            <a:effectRef idx="0">
+              <a:schemeClr val="accent1"/>
+            </a:effectRef>
+            <a:fontRef idx="minor">
+              <a:schemeClr val="lt1"/>
+            </a:fontRef>
+          </p:style>
+          <p:txBody>
+            <a:bodyPr rtlCol="0" anchor="ctr"/>
+            <a:lstStyle/>
+            <a:p>
+              <a:pPr algn="ctr"/>
+              <a:r>
+                <a:rPr lang="zh-CN" altLang="en-US" sz="1600" b="1" dirty="0" smtClean="0">
+                  <a:solidFill>
+                    <a:schemeClr val="tx1"/>
+                  </a:solidFill>
+                </a:rPr>
+                <a:t>计算时间</a:t>
+              </a:r>
+              <a:endParaRPr lang="zh-CN" altLang="en-US" sz="1600" b="1" dirty="0">
+                <a:solidFill>
+                  <a:schemeClr val="tx1"/>
+                </a:solidFill>
+              </a:endParaRPr>
+            </a:p>
+          </p:txBody>
+        </p:sp>
+        <p:sp>
+          <p:nvSpPr>
+            <p:cNvPr id="10" name="文本框 9"/>
+            <p:cNvSpPr txBox="1"/>
+            <p:nvPr/>
+          </p:nvSpPr>
+          <p:spPr>
+            <a:xfrm>
+              <a:off x="1466197" y="3619224"/>
+              <a:ext cx="1005403" cy="338554"/>
+            </a:xfrm>
+            <a:prstGeom prst="rect">
+              <a:avLst/>
+            </a:prstGeom>
+            <a:noFill/>
+          </p:spPr>
+          <p:txBody>
+            <a:bodyPr wrap="none" rtlCol="0">
+              <a:spAutoFit/>
+            </a:bodyPr>
+            <a:lstStyle/>
+            <a:p>
+              <a:r>
+                <a:rPr lang="zh-CN" altLang="en-US" sz="1600" dirty="0" smtClean="0"/>
+                <a:t>性能预测</a:t>
+              </a:r>
+              <a:endParaRPr lang="zh-CN" altLang="en-US" sz="1600" dirty="0"/>
+            </a:p>
+          </p:txBody>
+        </p:sp>
+        <p:sp>
+          <p:nvSpPr>
+            <p:cNvPr id="33" name="矩形 32"/>
+            <p:cNvSpPr/>
+            <p:nvPr/>
+          </p:nvSpPr>
+          <p:spPr>
+            <a:xfrm>
+              <a:off x="1893177" y="4749257"/>
+              <a:ext cx="1090441" cy="388761"/>
+            </a:xfrm>
+            <a:prstGeom prst="rect">
+              <a:avLst/>
+            </a:prstGeom>
+            <a:noFill/>
+            <a:ln w="19050">
+              <a:solidFill>
+                <a:schemeClr val="tx1"/>
+              </a:solidFill>
+            </a:ln>
+          </p:spPr>
+          <p:style>
+            <a:lnRef idx="2">
+              <a:schemeClr val="accent1">
+                <a:shade val="50000"/>
+              </a:schemeClr>
+            </a:lnRef>
+            <a:fillRef idx="1">
+              <a:schemeClr val="accent1"/>
+            </a:fillRef>
+            <a:effectRef idx="0">
+              <a:schemeClr val="accent1"/>
+            </a:effectRef>
+            <a:fontRef idx="minor">
+              <a:schemeClr val="lt1"/>
+            </a:fontRef>
+          </p:style>
+          <p:txBody>
+            <a:bodyPr rtlCol="0" anchor="ctr"/>
+            <a:lstStyle/>
+            <a:p>
+              <a:pPr algn="ctr"/>
+              <a:r>
+                <a:rPr lang="zh-CN" altLang="en-US" sz="1600" b="1" dirty="0" smtClean="0">
+                  <a:solidFill>
+                    <a:schemeClr val="tx1"/>
+                  </a:solidFill>
+                </a:rPr>
+                <a:t>种群分布</a:t>
+              </a:r>
+              <a:endParaRPr lang="zh-CN" altLang="en-US" sz="1600" b="1" dirty="0">
+                <a:solidFill>
+                  <a:schemeClr val="tx1"/>
+                </a:solidFill>
+              </a:endParaRPr>
+            </a:p>
+          </p:txBody>
+        </p:sp>
+        <p:cxnSp>
+          <p:nvCxnSpPr>
+            <p:cNvPr id="34" name="直接箭头连接符 33"/>
+            <p:cNvCxnSpPr>
+              <a:stCxn id="27" idx="2"/>
+              <a:endCxn id="28" idx="0"/>
+            </p:cNvCxnSpPr>
+            <p:nvPr/>
+          </p:nvCxnSpPr>
+          <p:spPr>
+            <a:xfrm>
+              <a:off x="2430092" y="3587438"/>
+              <a:ext cx="8307" cy="388314"/>
+            </a:xfrm>
+            <a:prstGeom prst="straightConnector1">
+              <a:avLst/>
+            </a:prstGeom>
+            <a:ln w="19050">
+              <a:solidFill>
+                <a:schemeClr val="tx1"/>
+              </a:solidFill>
+              <a:tailEnd type="triangle"/>
+            </a:ln>
+          </p:spPr>
+          <p:style>
+            <a:lnRef idx="1">
+              <a:schemeClr val="accent1"/>
+            </a:lnRef>
+            <a:fillRef idx="0">
+              <a:schemeClr val="accent1"/>
+            </a:fillRef>
+            <a:effectRef idx="0">
+              <a:schemeClr val="accent1"/>
+            </a:effectRef>
+            <a:fontRef idx="minor">
+              <a:schemeClr val="tx1"/>
+            </a:fontRef>
+          </p:style>
+        </p:cxnSp>
+        <p:sp>
+          <p:nvSpPr>
+            <p:cNvPr id="37" name="文本框 36"/>
+            <p:cNvSpPr txBox="1"/>
+            <p:nvPr/>
+          </p:nvSpPr>
+          <p:spPr>
+            <a:xfrm>
+              <a:off x="1269027" y="4387608"/>
+              <a:ext cx="1202573" cy="338554"/>
+            </a:xfrm>
+            <a:prstGeom prst="rect">
+              <a:avLst/>
+            </a:prstGeom>
+            <a:noFill/>
+          </p:spPr>
+          <p:txBody>
+            <a:bodyPr wrap="none" rtlCol="0">
+              <a:spAutoFit/>
+            </a:bodyPr>
+            <a:lstStyle/>
+            <a:p>
+              <a:pPr algn="ctr"/>
+              <a:r>
+                <a:rPr lang="zh-CN" altLang="en-US" sz="1600" dirty="0" smtClean="0"/>
+                <a:t>核密度估计</a:t>
+              </a:r>
+              <a:endParaRPr lang="zh-CN" altLang="en-US" sz="1600" dirty="0"/>
+            </a:p>
+          </p:txBody>
+        </p:sp>
+        <p:sp>
+          <p:nvSpPr>
+            <p:cNvPr id="15" name="矩形 14"/>
+            <p:cNvSpPr/>
+            <p:nvPr/>
+          </p:nvSpPr>
+          <p:spPr>
+            <a:xfrm>
+              <a:off x="933061" y="2680988"/>
+              <a:ext cx="2917372" cy="3470989"/>
+            </a:xfrm>
+            <a:prstGeom prst="rect">
+              <a:avLst/>
+            </a:prstGeom>
+            <a:noFill/>
+            <a:ln w="19050">
+              <a:solidFill>
+                <a:schemeClr val="tx1"/>
+              </a:solidFill>
+              <a:prstDash val="dash"/>
+            </a:ln>
+          </p:spPr>
+          <p:style>
+            <a:lnRef idx="2">
+              <a:schemeClr val="accent1">
+                <a:shade val="50000"/>
+              </a:schemeClr>
+            </a:lnRef>
+            <a:fillRef idx="1">
+              <a:schemeClr val="accent1"/>
+            </a:fillRef>
+            <a:effectRef idx="0">
+              <a:schemeClr val="accent1"/>
+            </a:effectRef>
+            <a:fontRef idx="minor">
+              <a:schemeClr val="lt1"/>
+            </a:fontRef>
+          </p:style>
+          <p:txBody>
+            <a:bodyPr rtlCol="0" anchor="ctr"/>
+            <a:lstStyle/>
+            <a:p>
+              <a:pPr algn="ctr"/>
+              <a:endParaRPr lang="zh-CN" altLang="en-US" dirty="0"/>
+            </a:p>
+          </p:txBody>
+        </p:sp>
+        <p:sp>
+          <p:nvSpPr>
+            <p:cNvPr id="16" name="文本框 15"/>
+            <p:cNvSpPr txBox="1"/>
+            <p:nvPr/>
+          </p:nvSpPr>
+          <p:spPr>
+            <a:xfrm>
+              <a:off x="1730514" y="2759009"/>
+              <a:ext cx="1415772" cy="338554"/>
+            </a:xfrm>
+            <a:prstGeom prst="rect">
+              <a:avLst/>
+            </a:prstGeom>
+            <a:noFill/>
+          </p:spPr>
+          <p:txBody>
+            <a:bodyPr wrap="none" rtlCol="0">
+              <a:spAutoFit/>
+            </a:bodyPr>
+            <a:lstStyle/>
+            <a:p>
+              <a:r>
+                <a:rPr lang="zh-CN" altLang="en-US" sz="1600" b="1" dirty="0" smtClean="0">
+                  <a:solidFill>
+                    <a:schemeClr val="accent1">
+                      <a:lumMod val="50000"/>
+                    </a:schemeClr>
+                  </a:solidFill>
+                </a:rPr>
+                <a:t>亲本网络采样</a:t>
+              </a:r>
+              <a:endParaRPr lang="zh-CN" altLang="en-US" sz="1600" b="1" dirty="0">
+                <a:solidFill>
+                  <a:schemeClr val="accent1">
+                    <a:lumMod val="50000"/>
+                  </a:schemeClr>
+                </a:solidFill>
+              </a:endParaRPr>
+            </a:p>
+          </p:txBody>
+        </p:sp>
+        <p:cxnSp>
+          <p:nvCxnSpPr>
+            <p:cNvPr id="48" name="直接箭头连接符 47"/>
+            <p:cNvCxnSpPr>
+              <a:stCxn id="28" idx="2"/>
+              <a:endCxn id="33" idx="0"/>
+            </p:cNvCxnSpPr>
+            <p:nvPr/>
+          </p:nvCxnSpPr>
+          <p:spPr>
+            <a:xfrm flipH="1">
+              <a:off x="2438398" y="4364513"/>
+              <a:ext cx="1" cy="384744"/>
+            </a:xfrm>
+            <a:prstGeom prst="straightConnector1">
+              <a:avLst/>
+            </a:prstGeom>
+            <a:ln w="19050">
+              <a:solidFill>
+                <a:schemeClr val="tx1"/>
+              </a:solidFill>
+              <a:tailEnd type="triangle"/>
+            </a:ln>
+          </p:spPr>
+          <p:style>
+            <a:lnRef idx="1">
+              <a:schemeClr val="accent1"/>
+            </a:lnRef>
+            <a:fillRef idx="0">
+              <a:schemeClr val="accent1"/>
+            </a:fillRef>
+            <a:effectRef idx="0">
+              <a:schemeClr val="accent1"/>
+            </a:effectRef>
+            <a:fontRef idx="minor">
+              <a:schemeClr val="tx1"/>
+            </a:fontRef>
+          </p:style>
+        </p:cxnSp>
+        <p:sp>
+          <p:nvSpPr>
+            <p:cNvPr id="53" name="矩形 52"/>
+            <p:cNvSpPr/>
+            <p:nvPr/>
+          </p:nvSpPr>
+          <p:spPr>
+            <a:xfrm>
+              <a:off x="1483564" y="5509366"/>
+              <a:ext cx="1909666" cy="468361"/>
+            </a:xfrm>
+            <a:prstGeom prst="rect">
+              <a:avLst/>
+            </a:prstGeom>
+            <a:noFill/>
+            <a:ln w="19050">
+              <a:solidFill>
+                <a:schemeClr val="tx1"/>
+              </a:solidFill>
+            </a:ln>
+          </p:spPr>
+          <p:style>
+            <a:lnRef idx="2">
+              <a:schemeClr val="accent1">
+                <a:shade val="50000"/>
+              </a:schemeClr>
+            </a:lnRef>
+            <a:fillRef idx="1">
+              <a:schemeClr val="accent1"/>
+            </a:fillRef>
+            <a:effectRef idx="0">
+              <a:schemeClr val="accent1"/>
+            </a:effectRef>
+            <a:fontRef idx="minor">
+              <a:schemeClr val="lt1"/>
+            </a:fontRef>
+          </p:style>
+          <p:txBody>
+            <a:bodyPr rtlCol="0" anchor="ctr"/>
+            <a:lstStyle/>
+            <a:p>
+              <a:pPr algn="ctr"/>
+              <a:r>
+                <a:rPr lang="zh-CN" altLang="en-US" sz="1600" b="1" dirty="0" smtClean="0">
+                  <a:solidFill>
+                    <a:schemeClr val="tx1"/>
+                  </a:solidFill>
+                </a:rPr>
+                <a:t>低密度区域的亲本</a:t>
+              </a:r>
+              <a:endParaRPr lang="zh-CN" altLang="en-US" sz="1600" b="1" dirty="0">
+                <a:solidFill>
+                  <a:schemeClr val="tx1"/>
+                </a:solidFill>
+              </a:endParaRPr>
+            </a:p>
+          </p:txBody>
+        </p:sp>
+        <p:cxnSp>
+          <p:nvCxnSpPr>
+            <p:cNvPr id="54" name="直接箭头连接符 53"/>
+            <p:cNvCxnSpPr>
+              <a:stCxn id="33" idx="2"/>
+              <a:endCxn id="53" idx="0"/>
+            </p:cNvCxnSpPr>
+            <p:nvPr/>
+          </p:nvCxnSpPr>
+          <p:spPr>
+            <a:xfrm flipH="1">
+              <a:off x="2438397" y="5138018"/>
+              <a:ext cx="1" cy="371348"/>
+            </a:xfrm>
+            <a:prstGeom prst="straightConnector1">
+              <a:avLst/>
+            </a:prstGeom>
+            <a:ln w="19050">
+              <a:solidFill>
+                <a:schemeClr val="tx1"/>
+              </a:solidFill>
+              <a:tailEnd type="triangle"/>
+            </a:ln>
+          </p:spPr>
+          <p:style>
+            <a:lnRef idx="1">
+              <a:schemeClr val="accent1"/>
+            </a:lnRef>
+            <a:fillRef idx="0">
+              <a:schemeClr val="accent1"/>
+            </a:fillRef>
+            <a:effectRef idx="0">
+              <a:schemeClr val="accent1"/>
+            </a:effectRef>
+            <a:fontRef idx="minor">
+              <a:schemeClr val="tx1"/>
+            </a:fontRef>
+          </p:style>
+        </p:cxnSp>
+        <p:sp>
+          <p:nvSpPr>
+            <p:cNvPr id="57" name="文本框 56"/>
+            <p:cNvSpPr txBox="1"/>
+            <p:nvPr/>
+          </p:nvSpPr>
+          <p:spPr>
+            <a:xfrm>
+              <a:off x="1876564" y="5173967"/>
+              <a:ext cx="595036" cy="338554"/>
+            </a:xfrm>
+            <a:prstGeom prst="rect">
+              <a:avLst/>
+            </a:prstGeom>
+            <a:noFill/>
+          </p:spPr>
+          <p:txBody>
+            <a:bodyPr wrap="none" rtlCol="0">
+              <a:spAutoFit/>
+            </a:bodyPr>
+            <a:lstStyle/>
+            <a:p>
+              <a:pPr algn="ctr"/>
+              <a:r>
+                <a:rPr lang="zh-CN" altLang="en-US" sz="1600" dirty="0" smtClean="0"/>
+                <a:t>采样</a:t>
+              </a:r>
+              <a:endParaRPr lang="zh-CN" altLang="en-US" sz="1600" dirty="0"/>
+            </a:p>
+          </p:txBody>
+        </p:sp>
+        <p:sp>
+          <p:nvSpPr>
+            <p:cNvPr id="58" name="矩形 57"/>
+            <p:cNvSpPr/>
+            <p:nvPr/>
+          </p:nvSpPr>
+          <p:spPr>
+            <a:xfrm>
+              <a:off x="5503059" y="2680987"/>
+              <a:ext cx="2917372" cy="3470989"/>
+            </a:xfrm>
+            <a:prstGeom prst="rect">
+              <a:avLst/>
+            </a:prstGeom>
+            <a:noFill/>
+            <a:ln w="19050">
+              <a:solidFill>
+                <a:schemeClr val="tx1"/>
+              </a:solidFill>
+              <a:prstDash val="dash"/>
+            </a:ln>
+          </p:spPr>
+          <p:style>
+            <a:lnRef idx="2">
+              <a:schemeClr val="accent1">
+                <a:shade val="50000"/>
+              </a:schemeClr>
+            </a:lnRef>
+            <a:fillRef idx="1">
+              <a:schemeClr val="accent1"/>
+            </a:fillRef>
+            <a:effectRef idx="0">
+              <a:schemeClr val="accent1"/>
+            </a:effectRef>
+            <a:fontRef idx="minor">
+              <a:schemeClr val="lt1"/>
+            </a:fontRef>
+          </p:style>
+          <p:txBody>
+            <a:bodyPr rtlCol="0" anchor="ctr"/>
+            <a:lstStyle/>
+            <a:p>
+              <a:pPr algn="ctr"/>
+              <a:endParaRPr lang="zh-CN" altLang="en-US"/>
+            </a:p>
+          </p:txBody>
+        </p:sp>
+        <p:sp>
+          <p:nvSpPr>
+            <p:cNvPr id="59" name="文本框 58"/>
+            <p:cNvSpPr txBox="1"/>
+            <p:nvPr/>
+          </p:nvSpPr>
+          <p:spPr>
+            <a:xfrm>
+              <a:off x="6253863" y="2759008"/>
+              <a:ext cx="1415772" cy="338554"/>
+            </a:xfrm>
+            <a:prstGeom prst="rect">
+              <a:avLst/>
+            </a:prstGeom>
+            <a:noFill/>
+          </p:spPr>
+          <p:txBody>
+            <a:bodyPr wrap="none" rtlCol="0">
+              <a:spAutoFit/>
+            </a:bodyPr>
+            <a:lstStyle/>
+            <a:p>
+              <a:pPr algn="ctr"/>
+              <a:r>
+                <a:rPr lang="zh-CN" altLang="en-US" sz="1600" b="1" dirty="0" smtClean="0">
+                  <a:solidFill>
+                    <a:schemeClr val="accent1">
+                      <a:lumMod val="50000"/>
+                    </a:schemeClr>
+                  </a:solidFill>
+                </a:rPr>
+                <a:t>子代网络生成</a:t>
+              </a:r>
+              <a:endParaRPr lang="zh-CN" altLang="en-US" sz="1600" b="1" dirty="0">
+                <a:solidFill>
+                  <a:schemeClr val="accent1">
+                    <a:lumMod val="50000"/>
+                  </a:schemeClr>
+                </a:solidFill>
+              </a:endParaRPr>
+            </a:p>
+          </p:txBody>
+        </p:sp>
+        <p:sp>
+          <p:nvSpPr>
+            <p:cNvPr id="60" name="矩形 59"/>
+            <p:cNvSpPr/>
+            <p:nvPr/>
+          </p:nvSpPr>
+          <p:spPr>
+            <a:xfrm>
+              <a:off x="6099220" y="5509365"/>
+              <a:ext cx="1725050" cy="468361"/>
+            </a:xfrm>
+            <a:prstGeom prst="rect">
+              <a:avLst/>
+            </a:prstGeom>
+            <a:noFill/>
+            <a:ln w="19050">
+              <a:solidFill>
+                <a:schemeClr val="tx1"/>
+              </a:solidFill>
+            </a:ln>
+          </p:spPr>
+          <p:style>
+            <a:lnRef idx="2">
+              <a:schemeClr val="accent1">
+                <a:shade val="50000"/>
+              </a:schemeClr>
+            </a:lnRef>
+            <a:fillRef idx="1">
+              <a:schemeClr val="accent1"/>
+            </a:fillRef>
+            <a:effectRef idx="0">
+              <a:schemeClr val="accent1"/>
+            </a:effectRef>
+            <a:fontRef idx="minor">
+              <a:schemeClr val="lt1"/>
+            </a:fontRef>
+          </p:style>
+          <p:txBody>
+            <a:bodyPr rtlCol="0" anchor="ctr"/>
+            <a:lstStyle/>
+            <a:p>
+              <a:pPr algn="ctr"/>
+              <a:r>
+                <a:rPr lang="zh-CN" altLang="en-US" sz="1600" b="1" dirty="0" smtClean="0">
+                  <a:solidFill>
+                    <a:schemeClr val="tx1"/>
+                  </a:solidFill>
+                </a:rPr>
+                <a:t>拟生成的子代</a:t>
+              </a:r>
+              <a:endParaRPr lang="zh-CN" altLang="en-US" sz="1600" b="1" dirty="0">
+                <a:solidFill>
+                  <a:schemeClr val="tx1"/>
+                </a:solidFill>
+              </a:endParaRPr>
+            </a:p>
+          </p:txBody>
+        </p:sp>
+        <p:cxnSp>
+          <p:nvCxnSpPr>
+            <p:cNvPr id="31" name="直接箭头连接符 30"/>
+            <p:cNvCxnSpPr>
+              <a:stCxn id="53" idx="3"/>
+              <a:endCxn id="60" idx="1"/>
+            </p:cNvCxnSpPr>
+            <p:nvPr/>
+          </p:nvCxnSpPr>
+          <p:spPr>
+            <a:xfrm flipV="1">
+              <a:off x="3393230" y="5743546"/>
+              <a:ext cx="2705990" cy="1"/>
+            </a:xfrm>
+            <a:prstGeom prst="straightConnector1">
+              <a:avLst/>
+            </a:prstGeom>
+            <a:ln w="19050">
+              <a:solidFill>
+                <a:schemeClr val="tx1"/>
+              </a:solidFill>
+              <a:tailEnd type="triangle"/>
+            </a:ln>
+          </p:spPr>
+          <p:style>
+            <a:lnRef idx="1">
+              <a:schemeClr val="accent1"/>
+            </a:lnRef>
+            <a:fillRef idx="0">
+              <a:schemeClr val="accent1"/>
+            </a:fillRef>
+            <a:effectRef idx="0">
+              <a:schemeClr val="accent1"/>
+            </a:effectRef>
+            <a:fontRef idx="minor">
+              <a:schemeClr val="tx1"/>
+            </a:fontRef>
+          </p:style>
+        </p:cxnSp>
+        <p:sp>
+          <p:nvSpPr>
+            <p:cNvPr id="32" name="文本框 31"/>
+            <p:cNvSpPr txBox="1"/>
+            <p:nvPr/>
+          </p:nvSpPr>
+          <p:spPr>
+            <a:xfrm>
+              <a:off x="3931774" y="5323692"/>
+              <a:ext cx="1415772" cy="793487"/>
+            </a:xfrm>
+            <a:prstGeom prst="rect">
+              <a:avLst/>
+            </a:prstGeom>
+            <a:noFill/>
+          </p:spPr>
+          <p:txBody>
+            <a:bodyPr wrap="none" rtlCol="0">
+              <a:spAutoFit/>
+            </a:bodyPr>
+            <a:lstStyle/>
+            <a:p>
+              <a:pPr algn="ctr">
+                <a:lnSpc>
+                  <a:spcPct val="150000"/>
+                </a:lnSpc>
+              </a:pPr>
+              <a:r>
+                <a:rPr lang="zh-CN" altLang="en-US" sz="1600" dirty="0" smtClean="0"/>
+                <a:t>网络态射</a:t>
+              </a:r>
+              <a:endParaRPr lang="en-US" altLang="zh-CN" sz="1600" dirty="0" smtClean="0"/>
+            </a:p>
+            <a:p>
+              <a:pPr algn="ctr">
+                <a:lnSpc>
+                  <a:spcPct val="150000"/>
+                </a:lnSpc>
+              </a:pPr>
+              <a:r>
+                <a:rPr lang="zh-CN" altLang="en-US" sz="1600" dirty="0" smtClean="0"/>
+                <a:t>近似网络态射</a:t>
+              </a:r>
+              <a:endParaRPr lang="zh-CN" altLang="en-US" sz="1600" dirty="0"/>
+            </a:p>
+          </p:txBody>
+        </p:sp>
+        <p:sp>
+          <p:nvSpPr>
+            <p:cNvPr id="79" name="矩形 78"/>
+            <p:cNvSpPr/>
+            <p:nvPr/>
+          </p:nvSpPr>
+          <p:spPr>
+            <a:xfrm>
+              <a:off x="6416524" y="4726162"/>
+              <a:ext cx="1090441" cy="388761"/>
+            </a:xfrm>
+            <a:prstGeom prst="rect">
+              <a:avLst/>
+            </a:prstGeom>
+            <a:noFill/>
+            <a:ln w="19050">
+              <a:solidFill>
+                <a:schemeClr val="tx1"/>
+              </a:solidFill>
+            </a:ln>
+          </p:spPr>
+          <p:style>
+            <a:lnRef idx="2">
+              <a:schemeClr val="accent1">
+                <a:shade val="50000"/>
+              </a:schemeClr>
+            </a:lnRef>
+            <a:fillRef idx="1">
+              <a:schemeClr val="accent1"/>
+            </a:fillRef>
+            <a:effectRef idx="0">
+              <a:schemeClr val="accent1"/>
+            </a:effectRef>
+            <a:fontRef idx="minor">
+              <a:schemeClr val="lt1"/>
+            </a:fontRef>
+          </p:style>
+          <p:txBody>
+            <a:bodyPr rtlCol="0" anchor="ctr"/>
+            <a:lstStyle/>
+            <a:p>
+              <a:pPr algn="ctr"/>
+              <a:r>
+                <a:rPr lang="zh-CN" altLang="en-US" sz="1600" b="1" dirty="0" smtClean="0">
+                  <a:solidFill>
+                    <a:schemeClr val="tx1"/>
+                  </a:solidFill>
+                </a:rPr>
+                <a:t>计算时间</a:t>
+              </a:r>
+              <a:endParaRPr lang="zh-CN" altLang="en-US" sz="1600" b="1" dirty="0">
+                <a:solidFill>
+                  <a:schemeClr val="tx1"/>
+                </a:solidFill>
+              </a:endParaRPr>
+            </a:p>
+          </p:txBody>
+        </p:sp>
+        <p:cxnSp>
+          <p:nvCxnSpPr>
+            <p:cNvPr id="80" name="直接箭头连接符 79"/>
+            <p:cNvCxnSpPr>
+              <a:stCxn id="60" idx="0"/>
+              <a:endCxn id="79" idx="2"/>
+            </p:cNvCxnSpPr>
+            <p:nvPr/>
+          </p:nvCxnSpPr>
+          <p:spPr>
+            <a:xfrm flipV="1">
+              <a:off x="6961745" y="5114923"/>
+              <a:ext cx="0" cy="394442"/>
+            </a:xfrm>
+            <a:prstGeom prst="straightConnector1">
+              <a:avLst/>
+            </a:prstGeom>
+            <a:ln w="19050">
+              <a:solidFill>
+                <a:schemeClr val="tx1"/>
+              </a:solidFill>
+              <a:tailEnd type="triangle"/>
+            </a:ln>
+          </p:spPr>
+          <p:style>
+            <a:lnRef idx="1">
+              <a:schemeClr val="accent1"/>
+            </a:lnRef>
+            <a:fillRef idx="0">
+              <a:schemeClr val="accent1"/>
+            </a:fillRef>
+            <a:effectRef idx="0">
+              <a:schemeClr val="accent1"/>
+            </a:effectRef>
+            <a:fontRef idx="minor">
+              <a:schemeClr val="tx1"/>
+            </a:fontRef>
+          </p:style>
+        </p:cxnSp>
+        <p:sp>
+          <p:nvSpPr>
+            <p:cNvPr id="81" name="文本框 80"/>
+            <p:cNvSpPr txBox="1"/>
+            <p:nvPr/>
+          </p:nvSpPr>
+          <p:spPr>
+            <a:xfrm>
+              <a:off x="6961744" y="5145708"/>
+              <a:ext cx="1005403" cy="338554"/>
+            </a:xfrm>
+            <a:prstGeom prst="rect">
+              <a:avLst/>
+            </a:prstGeom>
+            <a:noFill/>
+          </p:spPr>
+          <p:txBody>
+            <a:bodyPr wrap="none" rtlCol="0">
+              <a:spAutoFit/>
+            </a:bodyPr>
+            <a:lstStyle/>
+            <a:p>
+              <a:r>
+                <a:rPr lang="zh-CN" altLang="en-US" sz="1600" dirty="0" smtClean="0"/>
+                <a:t>性能预测</a:t>
+              </a:r>
+              <a:endParaRPr lang="zh-CN" altLang="en-US" sz="1600" dirty="0"/>
+            </a:p>
+          </p:txBody>
+        </p:sp>
+        <p:sp>
+          <p:nvSpPr>
+            <p:cNvPr id="85" name="矩形 84"/>
+            <p:cNvSpPr/>
+            <p:nvPr/>
+          </p:nvSpPr>
+          <p:spPr>
+            <a:xfrm>
+              <a:off x="6416524" y="3976311"/>
+              <a:ext cx="1090441" cy="388761"/>
+            </a:xfrm>
+            <a:prstGeom prst="rect">
+              <a:avLst/>
+            </a:prstGeom>
+            <a:noFill/>
+            <a:ln w="19050">
+              <a:solidFill>
+                <a:schemeClr val="tx1"/>
+              </a:solidFill>
+            </a:ln>
+          </p:spPr>
+          <p:style>
+            <a:lnRef idx="2">
+              <a:schemeClr val="accent1">
+                <a:shade val="50000"/>
+              </a:schemeClr>
+            </a:lnRef>
+            <a:fillRef idx="1">
+              <a:schemeClr val="accent1"/>
+            </a:fillRef>
+            <a:effectRef idx="0">
+              <a:schemeClr val="accent1"/>
+            </a:effectRef>
+            <a:fontRef idx="minor">
+              <a:schemeClr val="lt1"/>
+            </a:fontRef>
+          </p:style>
+          <p:txBody>
+            <a:bodyPr rtlCol="0" anchor="ctr"/>
+            <a:lstStyle/>
+            <a:p>
+              <a:pPr algn="ctr"/>
+              <a:r>
+                <a:rPr lang="zh-CN" altLang="en-US" sz="1600" b="1" dirty="0">
+                  <a:solidFill>
+                    <a:schemeClr val="tx1"/>
+                  </a:solidFill>
+                </a:rPr>
+                <a:t>子代</a:t>
+              </a:r>
+              <a:r>
+                <a:rPr lang="zh-CN" altLang="en-US" sz="1600" b="1" dirty="0" smtClean="0">
+                  <a:solidFill>
+                    <a:schemeClr val="tx1"/>
+                  </a:solidFill>
+                </a:rPr>
+                <a:t>分布</a:t>
+              </a:r>
+              <a:endParaRPr lang="zh-CN" altLang="en-US" sz="1600" b="1" dirty="0">
+                <a:solidFill>
+                  <a:schemeClr val="tx1"/>
+                </a:solidFill>
+              </a:endParaRPr>
+            </a:p>
+          </p:txBody>
+        </p:sp>
+        <p:sp>
+          <p:nvSpPr>
+            <p:cNvPr id="86" name="文本框 85"/>
+            <p:cNvSpPr txBox="1"/>
+            <p:nvPr/>
+          </p:nvSpPr>
+          <p:spPr>
+            <a:xfrm>
+              <a:off x="6963396" y="4372216"/>
+              <a:ext cx="1202573" cy="338554"/>
+            </a:xfrm>
+            <a:prstGeom prst="rect">
+              <a:avLst/>
+            </a:prstGeom>
+            <a:noFill/>
+          </p:spPr>
+          <p:txBody>
+            <a:bodyPr wrap="none" rtlCol="0">
+              <a:spAutoFit/>
+            </a:bodyPr>
+            <a:lstStyle/>
+            <a:p>
+              <a:pPr algn="ctr"/>
+              <a:r>
+                <a:rPr lang="zh-CN" altLang="en-US" sz="1600" dirty="0" smtClean="0"/>
+                <a:t>核密度估计</a:t>
+              </a:r>
+              <a:endParaRPr lang="zh-CN" altLang="en-US" sz="1600" dirty="0"/>
+            </a:p>
+          </p:txBody>
+        </p:sp>
+        <p:cxnSp>
+          <p:nvCxnSpPr>
+            <p:cNvPr id="87" name="直接箭头连接符 86"/>
+            <p:cNvCxnSpPr>
+              <a:stCxn id="79" idx="0"/>
+              <a:endCxn id="85" idx="2"/>
+            </p:cNvCxnSpPr>
+            <p:nvPr/>
+          </p:nvCxnSpPr>
+          <p:spPr>
+            <a:xfrm flipV="1">
+              <a:off x="6961745" y="4365072"/>
+              <a:ext cx="0" cy="361090"/>
+            </a:xfrm>
+            <a:prstGeom prst="straightConnector1">
+              <a:avLst/>
+            </a:prstGeom>
+            <a:ln w="19050">
+              <a:solidFill>
+                <a:schemeClr val="tx1"/>
+              </a:solidFill>
+              <a:tailEnd type="triangle"/>
+            </a:ln>
+          </p:spPr>
+          <p:style>
+            <a:lnRef idx="1">
+              <a:schemeClr val="accent1"/>
+            </a:lnRef>
+            <a:fillRef idx="0">
+              <a:schemeClr val="accent1"/>
+            </a:fillRef>
+            <a:effectRef idx="0">
+              <a:schemeClr val="accent1"/>
+            </a:effectRef>
+            <a:fontRef idx="minor">
+              <a:schemeClr val="tx1"/>
+            </a:fontRef>
+          </p:style>
+        </p:cxnSp>
+        <p:sp>
+          <p:nvSpPr>
+            <p:cNvPr id="88" name="矩形 87"/>
+            <p:cNvSpPr/>
+            <p:nvPr/>
+          </p:nvSpPr>
+          <p:spPr>
+            <a:xfrm>
+              <a:off x="6006911" y="3122665"/>
+              <a:ext cx="1909666" cy="468361"/>
+            </a:xfrm>
+            <a:prstGeom prst="rect">
+              <a:avLst/>
+            </a:prstGeom>
+            <a:noFill/>
+            <a:ln w="19050">
+              <a:solidFill>
+                <a:schemeClr val="tx1"/>
+              </a:solidFill>
+            </a:ln>
+          </p:spPr>
+          <p:style>
+            <a:lnRef idx="2">
+              <a:schemeClr val="accent1">
+                <a:shade val="50000"/>
+              </a:schemeClr>
+            </a:lnRef>
+            <a:fillRef idx="1">
+              <a:schemeClr val="accent1"/>
+            </a:fillRef>
+            <a:effectRef idx="0">
+              <a:schemeClr val="accent1"/>
+            </a:effectRef>
+            <a:fontRef idx="minor">
+              <a:schemeClr val="lt1"/>
+            </a:fontRef>
+          </p:style>
+          <p:txBody>
+            <a:bodyPr rtlCol="0" anchor="ctr"/>
+            <a:lstStyle/>
+            <a:p>
+              <a:pPr algn="ctr"/>
+              <a:r>
+                <a:rPr lang="zh-CN" altLang="en-US" sz="1600" b="1" dirty="0" smtClean="0">
+                  <a:solidFill>
+                    <a:schemeClr val="tx1"/>
+                  </a:solidFill>
+                </a:rPr>
+                <a:t>低密度区域的子代</a:t>
+              </a:r>
+              <a:endParaRPr lang="zh-CN" altLang="en-US" sz="1600" b="1" dirty="0">
+                <a:solidFill>
+                  <a:schemeClr val="tx1"/>
+                </a:solidFill>
+              </a:endParaRPr>
+            </a:p>
+          </p:txBody>
+        </p:sp>
+        <p:cxnSp>
+          <p:nvCxnSpPr>
+            <p:cNvPr id="89" name="直接箭头连接符 88"/>
+            <p:cNvCxnSpPr>
+              <a:stCxn id="85" idx="0"/>
+              <a:endCxn id="88" idx="2"/>
+            </p:cNvCxnSpPr>
+            <p:nvPr/>
+          </p:nvCxnSpPr>
+          <p:spPr>
+            <a:xfrm flipH="1" flipV="1">
+              <a:off x="6961744" y="3591026"/>
+              <a:ext cx="1" cy="385285"/>
+            </a:xfrm>
+            <a:prstGeom prst="straightConnector1">
+              <a:avLst/>
+            </a:prstGeom>
+            <a:ln w="19050">
+              <a:solidFill>
+                <a:schemeClr val="tx1"/>
+              </a:solidFill>
+              <a:tailEnd type="triangle"/>
+            </a:ln>
+          </p:spPr>
+          <p:style>
+            <a:lnRef idx="1">
+              <a:schemeClr val="accent1"/>
+            </a:lnRef>
+            <a:fillRef idx="0">
+              <a:schemeClr val="accent1"/>
+            </a:fillRef>
+            <a:effectRef idx="0">
+              <a:schemeClr val="accent1"/>
+            </a:effectRef>
+            <a:fontRef idx="minor">
+              <a:schemeClr val="tx1"/>
+            </a:fontRef>
+          </p:style>
+        </p:cxnSp>
+        <p:sp>
+          <p:nvSpPr>
+            <p:cNvPr id="90" name="文本框 89"/>
+            <p:cNvSpPr txBox="1"/>
+            <p:nvPr/>
+          </p:nvSpPr>
+          <p:spPr>
+            <a:xfrm>
+              <a:off x="6969646" y="3609474"/>
+              <a:ext cx="595036" cy="338554"/>
+            </a:xfrm>
+            <a:prstGeom prst="rect">
+              <a:avLst/>
+            </a:prstGeom>
+            <a:noFill/>
+          </p:spPr>
+          <p:txBody>
+            <a:bodyPr wrap="none" rtlCol="0">
+              <a:spAutoFit/>
+            </a:bodyPr>
+            <a:lstStyle/>
+            <a:p>
+              <a:pPr algn="ctr"/>
+              <a:r>
+                <a:rPr lang="zh-CN" altLang="en-US" sz="1600" dirty="0" smtClean="0"/>
+                <a:t>采样</a:t>
+              </a:r>
+              <a:endParaRPr lang="zh-CN" altLang="en-US" sz="1600" dirty="0"/>
+            </a:p>
+          </p:txBody>
+        </p:sp>
+        <p:cxnSp>
+          <p:nvCxnSpPr>
+            <p:cNvPr id="91" name="直接箭头连接符 90"/>
+            <p:cNvCxnSpPr>
+              <a:stCxn id="88" idx="1"/>
+              <a:endCxn id="27" idx="3"/>
+            </p:cNvCxnSpPr>
+            <p:nvPr/>
+          </p:nvCxnSpPr>
+          <p:spPr>
+            <a:xfrm flipH="1">
+              <a:off x="2983619" y="3356846"/>
+              <a:ext cx="3023292" cy="24664"/>
+            </a:xfrm>
+            <a:prstGeom prst="straightConnector1">
+              <a:avLst/>
+            </a:prstGeom>
+            <a:ln w="19050">
+              <a:solidFill>
+                <a:schemeClr val="tx1"/>
+              </a:solidFill>
+              <a:tailEnd type="triangle"/>
+            </a:ln>
+          </p:spPr>
+          <p:style>
+            <a:lnRef idx="1">
+              <a:schemeClr val="accent1"/>
+            </a:lnRef>
+            <a:fillRef idx="0">
+              <a:schemeClr val="accent1"/>
+            </a:fillRef>
+            <a:effectRef idx="0">
+              <a:schemeClr val="accent1"/>
+            </a:effectRef>
+            <a:fontRef idx="minor">
+              <a:schemeClr val="tx1"/>
+            </a:fontRef>
+          </p:style>
+        </p:cxnSp>
+        <p:sp>
+          <p:nvSpPr>
+            <p:cNvPr id="50" name="文本框 49"/>
+            <p:cNvSpPr txBox="1"/>
+            <p:nvPr/>
+          </p:nvSpPr>
+          <p:spPr>
+            <a:xfrm>
+              <a:off x="3964788" y="2747179"/>
+              <a:ext cx="1488233" cy="584775"/>
+            </a:xfrm>
+            <a:prstGeom prst="rect">
+              <a:avLst/>
+            </a:prstGeom>
+            <a:noFill/>
+          </p:spPr>
+          <p:txBody>
+            <a:bodyPr wrap="square" rtlCol="0">
+              <a:spAutoFit/>
+            </a:bodyPr>
+            <a:lstStyle/>
+            <a:p>
+              <a:r>
+                <a:rPr lang="zh-CN" altLang="en-US" sz="1600" dirty="0" smtClean="0"/>
+                <a:t>训练、评估预测精度</a:t>
+              </a:r>
+              <a:endParaRPr lang="zh-CN" altLang="en-US" sz="1600" dirty="0"/>
+            </a:p>
+          </p:txBody>
+        </p:sp>
+        <p:sp>
+          <p:nvSpPr>
+            <p:cNvPr id="51" name="文本框 50"/>
+            <p:cNvSpPr txBox="1"/>
+            <p:nvPr/>
+          </p:nvSpPr>
+          <p:spPr>
+            <a:xfrm>
+              <a:off x="3898425" y="3398457"/>
+              <a:ext cx="1620957" cy="338554"/>
+            </a:xfrm>
+            <a:prstGeom prst="rect">
+              <a:avLst/>
+            </a:prstGeom>
+            <a:noFill/>
+          </p:spPr>
+          <p:txBody>
+            <a:bodyPr wrap="none" rtlCol="0">
+              <a:spAutoFit/>
+            </a:bodyPr>
+            <a:lstStyle/>
+            <a:p>
+              <a:r>
+                <a:rPr lang="zh-CN" altLang="en-US" sz="1600" dirty="0" smtClean="0"/>
+                <a:t>计算帕累托前沿</a:t>
+              </a:r>
+              <a:endParaRPr lang="zh-CN" altLang="en-US" sz="1600" dirty="0"/>
+            </a:p>
+          </p:txBody>
+        </p:sp>
+        <p:sp>
+          <p:nvSpPr>
+            <p:cNvPr id="92" name="文本框 91"/>
+            <p:cNvSpPr txBox="1"/>
+            <p:nvPr/>
+          </p:nvSpPr>
+          <p:spPr>
+            <a:xfrm>
+              <a:off x="4095237" y="2412766"/>
+              <a:ext cx="1005403" cy="338554"/>
+            </a:xfrm>
+            <a:prstGeom prst="rect">
+              <a:avLst/>
+            </a:prstGeom>
+            <a:noFill/>
+          </p:spPr>
+          <p:txBody>
+            <a:bodyPr wrap="none" rtlCol="0">
+              <a:spAutoFit/>
+            </a:bodyPr>
+            <a:lstStyle/>
+            <a:p>
+              <a:pPr algn="ctr"/>
+              <a:r>
+                <a:rPr lang="zh-CN" altLang="en-US" sz="1600" b="1" dirty="0" smtClean="0">
+                  <a:solidFill>
+                    <a:schemeClr val="accent1">
+                      <a:lumMod val="50000"/>
+                    </a:schemeClr>
+                  </a:solidFill>
+                </a:rPr>
+                <a:t>种群更新</a:t>
+              </a:r>
+              <a:endParaRPr lang="zh-CN" altLang="en-US" sz="1600" b="1" dirty="0">
+                <a:solidFill>
+                  <a:schemeClr val="accent1">
+                    <a:lumMod val="50000"/>
+                  </a:schemeClr>
+                </a:solidFill>
+              </a:endParaRPr>
+            </a:p>
+          </p:txBody>
+        </p:sp>
+        <p:sp>
+          <p:nvSpPr>
+            <p:cNvPr id="94" name="文本框 93"/>
+            <p:cNvSpPr txBox="1"/>
+            <p:nvPr/>
+          </p:nvSpPr>
+          <p:spPr>
+            <a:xfrm>
+              <a:off x="4133542" y="5059111"/>
+              <a:ext cx="1005403" cy="338554"/>
+            </a:xfrm>
+            <a:prstGeom prst="rect">
+              <a:avLst/>
+            </a:prstGeom>
+            <a:noFill/>
+          </p:spPr>
+          <p:txBody>
+            <a:bodyPr wrap="none" rtlCol="0">
+              <a:spAutoFit/>
+            </a:bodyPr>
+            <a:lstStyle/>
+            <a:p>
+              <a:pPr algn="ctr"/>
+              <a:r>
+                <a:rPr lang="zh-CN" altLang="en-US" sz="1600" b="1" dirty="0" smtClean="0">
+                  <a:solidFill>
+                    <a:schemeClr val="accent1">
+                      <a:lumMod val="50000"/>
+                    </a:schemeClr>
+                  </a:solidFill>
+                </a:rPr>
+                <a:t>种群突变</a:t>
+              </a:r>
+              <a:endParaRPr lang="zh-CN" altLang="en-US" sz="1600" b="1" dirty="0">
+                <a:solidFill>
+                  <a:schemeClr val="accent1">
+                    <a:lumMod val="50000"/>
+                  </a:schemeClr>
+                </a:solidFill>
+              </a:endParaRPr>
+            </a:p>
+          </p:txBody>
+        </p:sp>
+      </p:grpSp>
+    </p:spTree>
+    <p:extLst>
+      <p:ext uri="{BB962C8B-B14F-4D97-AF65-F5344CB8AC3E}">
+        <p14:creationId xmlns:p14="http://schemas.microsoft.com/office/powerpoint/2010/main" val="1965133645"/>
+      </p:ext>
+    </p:extLst>
+  </p:cSld>
+  <p:clrMapOvr>
+    <a:masterClrMapping/>
+  </p:clrMapOvr>
+  <p:timing>
+    <p:tnLst>
+      <p:par>
+        <p:cTn id="1" dur="indefinite" restart="never" nodeType="tmRoot"/>
+      </p:par>
+    </p:tnLst>
+  </p:timing>
+</p:sld>
+</file>
+
+<file path=ppt/slides/slide11.xml><?xml version="1.0" encoding="utf-8"?>
+<p:sld xmlns:a="http://schemas.openxmlformats.org/drawingml/2006/main" xmlns:r="http://schemas.openxmlformats.org/officeDocument/2006/relationships" xmlns:p="http://schemas.openxmlformats.org/presentationml/2006/main">
+  <p:cSld>
+    <p:spTree>
+      <p:nvGrpSpPr>
+        <p:cNvPr id="1" name=""/>
+        <p:cNvGrpSpPr/>
+        <p:nvPr/>
+      </p:nvGrpSpPr>
+      <p:grpSpPr>
+        <a:xfrm>
+          <a:off x="0" y="0"/>
+          <a:ext cx="0" cy="0"/>
+          <a:chOff x="0" y="0"/>
+          <a:chExt cx="0" cy="0"/>
+        </a:xfrm>
+      </p:grpSpPr>
+      <p:grpSp>
+        <p:nvGrpSpPr>
           <p:cNvPr id="2" name="组合 1"/>
           <p:cNvGrpSpPr/>
           <p:nvPr/>
@@ -6755,7 +8149,7 @@
 </p:sld>
 </file>
 
-<file path=ppt/slides/slide11.xml><?xml version="1.0" encoding="utf-8"?>
+<file path=ppt/slides/slide12.xml><?xml version="1.0" encoding="utf-8"?>
 <p:sld xmlns:a="http://schemas.openxmlformats.org/drawingml/2006/main" xmlns:r="http://schemas.openxmlformats.org/officeDocument/2006/relationships" xmlns:p="http://schemas.openxmlformats.org/presentationml/2006/main">
   <p:cSld>
     <p:spTree>
@@ -8380,7 +9774,7 @@
 </p:sld>
 </file>
 
-<file path=ppt/slides/slide12.xml><?xml version="1.0" encoding="utf-8"?>
+<file path=ppt/slides/slide13.xml><?xml version="1.0" encoding="utf-8"?>
 <p:sld xmlns:a="http://schemas.openxmlformats.org/drawingml/2006/main" xmlns:r="http://schemas.openxmlformats.org/officeDocument/2006/relationships" xmlns:p="http://schemas.openxmlformats.org/presentationml/2006/main">
   <p:cSld>
     <p:spTree>
@@ -9331,7 +10725,7 @@
 </p:sld>
 </file>
 
-<file path=ppt/slides/slide13.xml><?xml version="1.0" encoding="utf-8"?>
+<file path=ppt/slides/slide14.xml><?xml version="1.0" encoding="utf-8"?>
 <p:sld xmlns:a="http://schemas.openxmlformats.org/drawingml/2006/main" xmlns:r="http://schemas.openxmlformats.org/officeDocument/2006/relationships" xmlns:p="http://schemas.openxmlformats.org/presentationml/2006/main">
   <p:cSld>
     <p:spTree>
@@ -10282,7 +11676,7 @@
 </p:sld>
 </file>
 
-<file path=ppt/slides/slide14.xml><?xml version="1.0" encoding="utf-8"?>
+<file path=ppt/slides/slide15.xml><?xml version="1.0" encoding="utf-8"?>
 <p:sld xmlns:a="http://schemas.openxmlformats.org/drawingml/2006/main" xmlns:r="http://schemas.openxmlformats.org/officeDocument/2006/relationships" xmlns:p="http://schemas.openxmlformats.org/presentationml/2006/main">
   <p:cSld>
     <p:spTree>
@@ -13958,6 +15352,43 @@
     <p:extLst>
       <p:ext uri="{BB962C8B-B14F-4D97-AF65-F5344CB8AC3E}">
         <p14:creationId xmlns:p14="http://schemas.microsoft.com/office/powerpoint/2010/main" val="3906291826"/>
+      </p:ext>
+    </p:extLst>
+  </p:cSld>
+  <p:clrMapOvr>
+    <a:masterClrMapping/>
+  </p:clrMapOvr>
+  <p:timing>
+    <p:tnLst>
+      <p:par>
+        <p:cTn id="1" dur="indefinite" restart="never" nodeType="tmRoot"/>
+      </p:par>
+    </p:tnLst>
+  </p:timing>
+</p:sld>
+</file>
+
+<file path=ppt/slides/slide16.xml><?xml version="1.0" encoding="utf-8"?>
+<p:sld xmlns:a="http://schemas.openxmlformats.org/drawingml/2006/main" xmlns:r="http://schemas.openxmlformats.org/officeDocument/2006/relationships" xmlns:p="http://schemas.openxmlformats.org/presentationml/2006/main">
+  <p:cSld>
+    <p:spTree>
+      <p:nvGrpSpPr>
+        <p:cNvPr id="1" name=""/>
+        <p:cNvGrpSpPr/>
+        <p:nvPr/>
+      </p:nvGrpSpPr>
+      <p:grpSpPr>
+        <a:xfrm>
+          <a:off x="0" y="0"/>
+          <a:ext cx="0" cy="0"/>
+          <a:chOff x="0" y="0"/>
+          <a:chExt cx="0" cy="0"/>
+        </a:xfrm>
+      </p:grpSpPr>
+    </p:spTree>
+    <p:extLst>
+      <p:ext uri="{BB962C8B-B14F-4D97-AF65-F5344CB8AC3E}">
+        <p14:creationId xmlns:p14="http://schemas.microsoft.com/office/powerpoint/2010/main" val="1283691051"/>
       </p:ext>
     </p:extLst>
   </p:cSld>
@@ -21209,7 +22640,6 @@
               <a:rPr lang="zh-CN" altLang="en-US" sz="2400" b="1" dirty="0"/>
               <a:t>预测与优化</a:t>
             </a:r>
-            <a:endParaRPr lang="zh-CN" altLang="en-US" sz="2400" b="1" dirty="0"/>
           </a:p>
         </p:txBody>
       </p:sp>
@@ -22347,14 +23777,7 @@
                 <a:latin typeface="宋体" panose="02010600030101010101" pitchFamily="2" charset="-122"/>
                 <a:ea typeface="宋体" panose="02010600030101010101" pitchFamily="2" charset="-122"/>
               </a:rPr>
-              <a:t>研究</a:t>
-            </a:r>
-            <a:r>
-              <a:rPr lang="zh-CN" altLang="en-US" dirty="0" smtClean="0">
-                <a:latin typeface="宋体" panose="02010600030101010101" pitchFamily="2" charset="-122"/>
-                <a:ea typeface="宋体" panose="02010600030101010101" pitchFamily="2" charset="-122"/>
-              </a:rPr>
-              <a:t>内容二</a:t>
+              <a:t>研究内容二</a:t>
             </a:r>
             <a:endParaRPr lang="zh-CN" altLang="en-US" dirty="0">
               <a:latin typeface="宋体" panose="02010600030101010101" pitchFamily="2" charset="-122"/>
@@ -22823,14 +24246,7 @@
                 <a:latin typeface="宋体" panose="02010600030101010101" pitchFamily="2" charset="-122"/>
                 <a:ea typeface="宋体" panose="02010600030101010101" pitchFamily="2" charset="-122"/>
               </a:rPr>
-              <a:t>研究</a:t>
-            </a:r>
-            <a:r>
-              <a:rPr lang="zh-CN" altLang="en-US" dirty="0" smtClean="0">
-                <a:latin typeface="宋体" panose="02010600030101010101" pitchFamily="2" charset="-122"/>
-                <a:ea typeface="宋体" panose="02010600030101010101" pitchFamily="2" charset="-122"/>
-              </a:rPr>
-              <a:t>内容三</a:t>
+              <a:t>研究内容三</a:t>
             </a:r>
             <a:endParaRPr lang="zh-CN" altLang="en-US" dirty="0">
               <a:latin typeface="宋体" panose="02010600030101010101" pitchFamily="2" charset="-122"/>
@@ -23557,1378 +24973,1643 @@
           <a:chExt cx="0" cy="0"/>
         </a:xfrm>
       </p:grpSpPr>
-      <p:grpSp>
-        <p:nvGrpSpPr>
-          <p:cNvPr id="52" name="组合 51"/>
-          <p:cNvGrpSpPr/>
+      <p:sp>
+        <p:nvSpPr>
+          <p:cNvPr id="11" name="矩形 10"/>
+          <p:cNvSpPr/>
           <p:nvPr/>
-        </p:nvGrpSpPr>
-        <p:grpSpPr>
+        </p:nvSpPr>
+        <p:spPr>
           <a:xfrm>
-            <a:off x="933061" y="2412766"/>
-            <a:ext cx="7487370" cy="3739211"/>
-            <a:chOff x="933061" y="2412766"/>
-            <a:chExt cx="7487370" cy="3739211"/>
+            <a:off x="5639435" y="1714500"/>
+            <a:ext cx="3437888" cy="428624"/>
           </a:xfrm>
-        </p:grpSpPr>
-        <p:sp>
-          <p:nvSpPr>
-            <p:cNvPr id="27" name="矩形 26"/>
-            <p:cNvSpPr/>
-            <p:nvPr/>
-          </p:nvSpPr>
-          <p:spPr>
-            <a:xfrm>
-              <a:off x="1876565" y="3175582"/>
-              <a:ext cx="1107054" cy="411856"/>
-            </a:xfrm>
-            <a:prstGeom prst="rect">
-              <a:avLst/>
-            </a:prstGeom>
-            <a:noFill/>
-            <a:ln w="19050">
-              <a:solidFill>
-                <a:schemeClr val="tx1"/>
-              </a:solidFill>
-            </a:ln>
-          </p:spPr>
-          <p:style>
-            <a:lnRef idx="2">
+          <a:prstGeom prst="rect">
+            <a:avLst/>
+          </a:prstGeom>
+          <a:solidFill>
+            <a:schemeClr val="accent1">
+              <a:lumMod val="60000"/>
+              <a:lumOff val="40000"/>
+            </a:schemeClr>
+          </a:solidFill>
+          <a:ln>
+            <a:solidFill>
               <a:schemeClr val="accent1">
-                <a:shade val="50000"/>
+                <a:lumMod val="60000"/>
+                <a:lumOff val="40000"/>
               </a:schemeClr>
-            </a:lnRef>
-            <a:fillRef idx="1">
-              <a:schemeClr val="accent1"/>
-            </a:fillRef>
-            <a:effectRef idx="0">
-              <a:schemeClr val="accent1"/>
-            </a:effectRef>
-            <a:fontRef idx="minor">
-              <a:schemeClr val="lt1"/>
-            </a:fontRef>
-          </p:style>
-          <p:txBody>
-            <a:bodyPr rtlCol="0" anchor="ctr"/>
-            <a:lstStyle/>
-            <a:p>
-              <a:pPr algn="ctr"/>
-              <a:r>
-                <a:rPr lang="zh-CN" altLang="en-US" sz="1600" b="1" dirty="0" smtClean="0">
-                  <a:solidFill>
-                    <a:schemeClr val="tx1"/>
-                  </a:solidFill>
-                </a:rPr>
-                <a:t>网络种群</a:t>
-              </a:r>
-              <a:endParaRPr lang="zh-CN" altLang="en-US" sz="1600" b="1" dirty="0">
-                <a:solidFill>
-                  <a:schemeClr val="tx1"/>
-                </a:solidFill>
-              </a:endParaRPr>
-            </a:p>
-          </p:txBody>
-        </p:sp>
-        <p:sp>
-          <p:nvSpPr>
-            <p:cNvPr id="28" name="矩形 27"/>
-            <p:cNvSpPr/>
-            <p:nvPr/>
-          </p:nvSpPr>
-          <p:spPr>
-            <a:xfrm>
-              <a:off x="1893178" y="3975752"/>
-              <a:ext cx="1090441" cy="388761"/>
-            </a:xfrm>
-            <a:prstGeom prst="rect">
-              <a:avLst/>
-            </a:prstGeom>
-            <a:noFill/>
-            <a:ln w="19050">
-              <a:solidFill>
-                <a:schemeClr val="tx1"/>
-              </a:solidFill>
-            </a:ln>
-          </p:spPr>
-          <p:style>
-            <a:lnRef idx="2">
+            </a:solidFill>
+          </a:ln>
+        </p:spPr>
+        <p:style>
+          <a:lnRef idx="2">
+            <a:schemeClr val="accent1">
+              <a:shade val="50000"/>
+            </a:schemeClr>
+          </a:lnRef>
+          <a:fillRef idx="1">
+            <a:schemeClr val="accent1"/>
+          </a:fillRef>
+          <a:effectRef idx="0">
+            <a:schemeClr val="accent1"/>
+          </a:effectRef>
+          <a:fontRef idx="minor">
+            <a:schemeClr val="lt1"/>
+          </a:fontRef>
+        </p:style>
+        <p:txBody>
+          <a:bodyPr rtlCol="0" anchor="ctr"/>
+          <a:lstStyle/>
+          <a:p>
+            <a:pPr algn="ctr"/>
+            <a:endParaRPr lang="zh-CN" altLang="en-US">
+              <a:latin typeface="Times New Roman" panose="02020603050405020304" pitchFamily="18" charset="0"/>
+              <a:ea typeface="宋体" panose="02010600030101010101" pitchFamily="2" charset="-122"/>
+              <a:cs typeface="Times New Roman" panose="02020603050405020304" pitchFamily="18" charset="0"/>
+            </a:endParaRPr>
+          </a:p>
+        </p:txBody>
+      </p:sp>
+      <p:sp>
+        <p:nvSpPr>
+          <p:cNvPr id="37" name="矩形 36"/>
+          <p:cNvSpPr/>
+          <p:nvPr/>
+        </p:nvSpPr>
+        <p:spPr>
+          <a:xfrm>
+            <a:off x="5280836" y="3369679"/>
+            <a:ext cx="2623359" cy="466991"/>
+          </a:xfrm>
+          <a:prstGeom prst="rect">
+            <a:avLst/>
+          </a:prstGeom>
+          <a:solidFill>
+            <a:schemeClr val="accent2">
+              <a:lumMod val="60000"/>
+              <a:lumOff val="40000"/>
+            </a:schemeClr>
+          </a:solidFill>
+          <a:ln>
+            <a:solidFill>
+              <a:srgbClr val="F4B183"/>
+            </a:solidFill>
+          </a:ln>
+        </p:spPr>
+        <p:style>
+          <a:lnRef idx="2">
+            <a:schemeClr val="accent1">
+              <a:shade val="50000"/>
+            </a:schemeClr>
+          </a:lnRef>
+          <a:fillRef idx="1">
+            <a:schemeClr val="accent1"/>
+          </a:fillRef>
+          <a:effectRef idx="0">
+            <a:schemeClr val="accent1"/>
+          </a:effectRef>
+          <a:fontRef idx="minor">
+            <a:schemeClr val="lt1"/>
+          </a:fontRef>
+        </p:style>
+        <p:txBody>
+          <a:bodyPr rtlCol="0" anchor="ctr"/>
+          <a:lstStyle/>
+          <a:p>
+            <a:pPr algn="ctr"/>
+            <a:endParaRPr lang="zh-CN" altLang="en-US" dirty="0">
+              <a:latin typeface="Times New Roman" panose="02020603050405020304" pitchFamily="18" charset="0"/>
+              <a:ea typeface="宋体" panose="02010600030101010101" pitchFamily="2" charset="-122"/>
+              <a:cs typeface="Times New Roman" panose="02020603050405020304" pitchFamily="18" charset="0"/>
+            </a:endParaRPr>
+          </a:p>
+        </p:txBody>
+      </p:sp>
+      <p:sp>
+        <p:nvSpPr>
+          <p:cNvPr id="36" name="矩形 35"/>
+          <p:cNvSpPr/>
+          <p:nvPr/>
+        </p:nvSpPr>
+        <p:spPr>
+          <a:xfrm>
+            <a:off x="5280836" y="2143125"/>
+            <a:ext cx="2623359" cy="476250"/>
+          </a:xfrm>
+          <a:prstGeom prst="rect">
+            <a:avLst/>
+          </a:prstGeom>
+          <a:solidFill>
+            <a:schemeClr val="accent2">
+              <a:lumMod val="60000"/>
+              <a:lumOff val="40000"/>
+            </a:schemeClr>
+          </a:solidFill>
+          <a:ln>
+            <a:solidFill>
+              <a:srgbClr val="F4B183"/>
+            </a:solidFill>
+          </a:ln>
+        </p:spPr>
+        <p:style>
+          <a:lnRef idx="2">
+            <a:schemeClr val="accent1">
+              <a:shade val="50000"/>
+            </a:schemeClr>
+          </a:lnRef>
+          <a:fillRef idx="1">
+            <a:schemeClr val="accent1"/>
+          </a:fillRef>
+          <a:effectRef idx="0">
+            <a:schemeClr val="accent1"/>
+          </a:effectRef>
+          <a:fontRef idx="minor">
+            <a:schemeClr val="lt1"/>
+          </a:fontRef>
+        </p:style>
+        <p:txBody>
+          <a:bodyPr rtlCol="0" anchor="ctr"/>
+          <a:lstStyle/>
+          <a:p>
+            <a:pPr algn="ctr"/>
+            <a:endParaRPr lang="zh-CN" altLang="en-US" dirty="0">
+              <a:latin typeface="Times New Roman" panose="02020603050405020304" pitchFamily="18" charset="0"/>
+              <a:ea typeface="宋体" panose="02010600030101010101" pitchFamily="2" charset="-122"/>
+              <a:cs typeface="Times New Roman" panose="02020603050405020304" pitchFamily="18" charset="0"/>
+            </a:endParaRPr>
+          </a:p>
+        </p:txBody>
+      </p:sp>
+      <p:sp>
+        <p:nvSpPr>
+          <p:cNvPr id="35" name="矩形 34"/>
+          <p:cNvSpPr/>
+          <p:nvPr/>
+        </p:nvSpPr>
+        <p:spPr>
+          <a:xfrm>
+            <a:off x="5280836" y="1246444"/>
+            <a:ext cx="2623359" cy="460704"/>
+          </a:xfrm>
+          <a:prstGeom prst="rect">
+            <a:avLst/>
+          </a:prstGeom>
+          <a:solidFill>
+            <a:schemeClr val="accent2">
+              <a:lumMod val="60000"/>
+              <a:lumOff val="40000"/>
+            </a:schemeClr>
+          </a:solidFill>
+          <a:ln>
+            <a:solidFill>
+              <a:srgbClr val="F4B183"/>
+            </a:solidFill>
+          </a:ln>
+        </p:spPr>
+        <p:style>
+          <a:lnRef idx="2">
+            <a:schemeClr val="accent1">
+              <a:shade val="50000"/>
+            </a:schemeClr>
+          </a:lnRef>
+          <a:fillRef idx="1">
+            <a:schemeClr val="accent1"/>
+          </a:fillRef>
+          <a:effectRef idx="0">
+            <a:schemeClr val="accent1"/>
+          </a:effectRef>
+          <a:fontRef idx="minor">
+            <a:schemeClr val="lt1"/>
+          </a:fontRef>
+        </p:style>
+        <p:txBody>
+          <a:bodyPr rtlCol="0" anchor="ctr"/>
+          <a:lstStyle/>
+          <a:p>
+            <a:pPr algn="ctr"/>
+            <a:endParaRPr lang="zh-CN" altLang="en-US" dirty="0">
+              <a:latin typeface="Times New Roman" panose="02020603050405020304" pitchFamily="18" charset="0"/>
+              <a:ea typeface="宋体" panose="02010600030101010101" pitchFamily="2" charset="-122"/>
+              <a:cs typeface="Times New Roman" panose="02020603050405020304" pitchFamily="18" charset="0"/>
+            </a:endParaRPr>
+          </a:p>
+        </p:txBody>
+      </p:sp>
+      <p:sp>
+        <p:nvSpPr>
+          <p:cNvPr id="32" name="矩形 31"/>
+          <p:cNvSpPr/>
+          <p:nvPr/>
+        </p:nvSpPr>
+        <p:spPr>
+          <a:xfrm>
+            <a:off x="2647952" y="3362326"/>
+            <a:ext cx="2623359" cy="476250"/>
+          </a:xfrm>
+          <a:prstGeom prst="rect">
+            <a:avLst/>
+          </a:prstGeom>
+          <a:solidFill>
+            <a:schemeClr val="accent2">
+              <a:lumMod val="60000"/>
+              <a:lumOff val="40000"/>
+            </a:schemeClr>
+          </a:solidFill>
+          <a:ln>
+            <a:solidFill>
+              <a:srgbClr val="F4B183"/>
+            </a:solidFill>
+          </a:ln>
+        </p:spPr>
+        <p:style>
+          <a:lnRef idx="2">
+            <a:schemeClr val="accent1">
+              <a:shade val="50000"/>
+            </a:schemeClr>
+          </a:lnRef>
+          <a:fillRef idx="1">
+            <a:schemeClr val="accent1"/>
+          </a:fillRef>
+          <a:effectRef idx="0">
+            <a:schemeClr val="accent1"/>
+          </a:effectRef>
+          <a:fontRef idx="minor">
+            <a:schemeClr val="lt1"/>
+          </a:fontRef>
+        </p:style>
+        <p:txBody>
+          <a:bodyPr rtlCol="0" anchor="ctr"/>
+          <a:lstStyle/>
+          <a:p>
+            <a:pPr algn="ctr"/>
+            <a:endParaRPr lang="zh-CN" altLang="en-US" dirty="0">
+              <a:latin typeface="Times New Roman" panose="02020603050405020304" pitchFamily="18" charset="0"/>
+              <a:ea typeface="宋体" panose="02010600030101010101" pitchFamily="2" charset="-122"/>
+              <a:cs typeface="Times New Roman" panose="02020603050405020304" pitchFamily="18" charset="0"/>
+            </a:endParaRPr>
+          </a:p>
+        </p:txBody>
+      </p:sp>
+      <p:sp>
+        <p:nvSpPr>
+          <p:cNvPr id="31" name="矩形 30"/>
+          <p:cNvSpPr/>
+          <p:nvPr/>
+        </p:nvSpPr>
+        <p:spPr>
+          <a:xfrm>
+            <a:off x="2647952" y="2143126"/>
+            <a:ext cx="2623359" cy="476250"/>
+          </a:xfrm>
+          <a:prstGeom prst="rect">
+            <a:avLst/>
+          </a:prstGeom>
+          <a:solidFill>
+            <a:schemeClr val="accent2">
+              <a:lumMod val="60000"/>
+              <a:lumOff val="40000"/>
+            </a:schemeClr>
+          </a:solidFill>
+          <a:ln>
+            <a:solidFill>
+              <a:srgbClr val="F4B183"/>
+            </a:solidFill>
+          </a:ln>
+        </p:spPr>
+        <p:style>
+          <a:lnRef idx="2">
+            <a:schemeClr val="accent1">
+              <a:shade val="50000"/>
+            </a:schemeClr>
+          </a:lnRef>
+          <a:fillRef idx="1">
+            <a:schemeClr val="accent1"/>
+          </a:fillRef>
+          <a:effectRef idx="0">
+            <a:schemeClr val="accent1"/>
+          </a:effectRef>
+          <a:fontRef idx="minor">
+            <a:schemeClr val="lt1"/>
+          </a:fontRef>
+        </p:style>
+        <p:txBody>
+          <a:bodyPr rtlCol="0" anchor="ctr"/>
+          <a:lstStyle/>
+          <a:p>
+            <a:pPr algn="ctr"/>
+            <a:endParaRPr lang="zh-CN" altLang="en-US" dirty="0">
+              <a:latin typeface="Times New Roman" panose="02020603050405020304" pitchFamily="18" charset="0"/>
+              <a:ea typeface="宋体" panose="02010600030101010101" pitchFamily="2" charset="-122"/>
+              <a:cs typeface="Times New Roman" panose="02020603050405020304" pitchFamily="18" charset="0"/>
+            </a:endParaRPr>
+          </a:p>
+        </p:txBody>
+      </p:sp>
+      <p:sp>
+        <p:nvSpPr>
+          <p:cNvPr id="30" name="矩形 29"/>
+          <p:cNvSpPr/>
+          <p:nvPr/>
+        </p:nvSpPr>
+        <p:spPr>
+          <a:xfrm>
+            <a:off x="2647952" y="1238252"/>
+            <a:ext cx="2623359" cy="468896"/>
+          </a:xfrm>
+          <a:prstGeom prst="rect">
+            <a:avLst/>
+          </a:prstGeom>
+          <a:solidFill>
+            <a:schemeClr val="accent2">
+              <a:lumMod val="60000"/>
+              <a:lumOff val="40000"/>
+            </a:schemeClr>
+          </a:solidFill>
+          <a:ln>
+            <a:solidFill>
+              <a:srgbClr val="F4B183"/>
+            </a:solidFill>
+          </a:ln>
+        </p:spPr>
+        <p:style>
+          <a:lnRef idx="2">
+            <a:schemeClr val="accent1">
+              <a:shade val="50000"/>
+            </a:schemeClr>
+          </a:lnRef>
+          <a:fillRef idx="1">
+            <a:schemeClr val="accent1"/>
+          </a:fillRef>
+          <a:effectRef idx="0">
+            <a:schemeClr val="accent1"/>
+          </a:effectRef>
+          <a:fontRef idx="minor">
+            <a:schemeClr val="lt1"/>
+          </a:fontRef>
+        </p:style>
+        <p:txBody>
+          <a:bodyPr rtlCol="0" anchor="ctr"/>
+          <a:lstStyle/>
+          <a:p>
+            <a:pPr algn="ctr"/>
+            <a:endParaRPr lang="zh-CN" altLang="en-US" dirty="0">
+              <a:latin typeface="Times New Roman" panose="02020603050405020304" pitchFamily="18" charset="0"/>
+              <a:ea typeface="宋体" panose="02010600030101010101" pitchFamily="2" charset="-122"/>
+              <a:cs typeface="Times New Roman" panose="02020603050405020304" pitchFamily="18" charset="0"/>
+            </a:endParaRPr>
+          </a:p>
+        </p:txBody>
+      </p:sp>
+      <p:sp>
+        <p:nvSpPr>
+          <p:cNvPr id="29" name="矩形 28"/>
+          <p:cNvSpPr/>
+          <p:nvPr/>
+        </p:nvSpPr>
+        <p:spPr>
+          <a:xfrm>
+            <a:off x="2019298" y="3369679"/>
+            <a:ext cx="619127" cy="476250"/>
+          </a:xfrm>
+          <a:prstGeom prst="rect">
+            <a:avLst/>
+          </a:prstGeom>
+          <a:solidFill>
+            <a:schemeClr val="bg2">
+              <a:lumMod val="90000"/>
+            </a:schemeClr>
+          </a:solidFill>
+          <a:ln>
+            <a:solidFill>
+              <a:schemeClr val="bg2">
+                <a:lumMod val="90000"/>
+              </a:schemeClr>
+            </a:solidFill>
+          </a:ln>
+        </p:spPr>
+        <p:style>
+          <a:lnRef idx="2">
+            <a:schemeClr val="accent1">
+              <a:shade val="50000"/>
+            </a:schemeClr>
+          </a:lnRef>
+          <a:fillRef idx="1">
+            <a:schemeClr val="accent1"/>
+          </a:fillRef>
+          <a:effectRef idx="0">
+            <a:schemeClr val="accent1"/>
+          </a:effectRef>
+          <a:fontRef idx="minor">
+            <a:schemeClr val="lt1"/>
+          </a:fontRef>
+        </p:style>
+        <p:txBody>
+          <a:bodyPr rtlCol="0" anchor="ctr"/>
+          <a:lstStyle/>
+          <a:p>
+            <a:pPr algn="ctr"/>
+            <a:endParaRPr lang="zh-CN" altLang="en-US">
+              <a:latin typeface="Times New Roman" panose="02020603050405020304" pitchFamily="18" charset="0"/>
+              <a:ea typeface="宋体" panose="02010600030101010101" pitchFamily="2" charset="-122"/>
+              <a:cs typeface="Times New Roman" panose="02020603050405020304" pitchFamily="18" charset="0"/>
+            </a:endParaRPr>
+          </a:p>
+        </p:txBody>
+      </p:sp>
+      <p:sp>
+        <p:nvSpPr>
+          <p:cNvPr id="28" name="矩形 27"/>
+          <p:cNvSpPr/>
+          <p:nvPr/>
+        </p:nvSpPr>
+        <p:spPr>
+          <a:xfrm>
+            <a:off x="2019298" y="2143126"/>
+            <a:ext cx="619127" cy="476250"/>
+          </a:xfrm>
+          <a:prstGeom prst="rect">
+            <a:avLst/>
+          </a:prstGeom>
+          <a:solidFill>
+            <a:schemeClr val="bg2">
+              <a:lumMod val="90000"/>
+            </a:schemeClr>
+          </a:solidFill>
+          <a:ln>
+            <a:solidFill>
+              <a:schemeClr val="bg2">
+                <a:lumMod val="90000"/>
+              </a:schemeClr>
+            </a:solidFill>
+          </a:ln>
+        </p:spPr>
+        <p:style>
+          <a:lnRef idx="2">
+            <a:schemeClr val="accent1">
+              <a:shade val="50000"/>
+            </a:schemeClr>
+          </a:lnRef>
+          <a:fillRef idx="1">
+            <a:schemeClr val="accent1"/>
+          </a:fillRef>
+          <a:effectRef idx="0">
+            <a:schemeClr val="accent1"/>
+          </a:effectRef>
+          <a:fontRef idx="minor">
+            <a:schemeClr val="lt1"/>
+          </a:fontRef>
+        </p:style>
+        <p:txBody>
+          <a:bodyPr rtlCol="0" anchor="ctr"/>
+          <a:lstStyle/>
+          <a:p>
+            <a:pPr algn="ctr"/>
+            <a:endParaRPr lang="zh-CN" altLang="en-US">
+              <a:latin typeface="Times New Roman" panose="02020603050405020304" pitchFamily="18" charset="0"/>
+              <a:ea typeface="宋体" panose="02010600030101010101" pitchFamily="2" charset="-122"/>
+              <a:cs typeface="Times New Roman" panose="02020603050405020304" pitchFamily="18" charset="0"/>
+            </a:endParaRPr>
+          </a:p>
+        </p:txBody>
+      </p:sp>
+      <p:sp>
+        <p:nvSpPr>
+          <p:cNvPr id="7" name="矩形 6"/>
+          <p:cNvSpPr/>
+          <p:nvPr/>
+        </p:nvSpPr>
+        <p:spPr>
+          <a:xfrm>
+            <a:off x="2019298" y="1238251"/>
+            <a:ext cx="619127" cy="476250"/>
+          </a:xfrm>
+          <a:prstGeom prst="rect">
+            <a:avLst/>
+          </a:prstGeom>
+          <a:solidFill>
+            <a:schemeClr val="bg2">
+              <a:lumMod val="90000"/>
+            </a:schemeClr>
+          </a:solidFill>
+          <a:ln>
+            <a:solidFill>
+              <a:schemeClr val="bg2">
+                <a:lumMod val="90000"/>
+              </a:schemeClr>
+            </a:solidFill>
+          </a:ln>
+        </p:spPr>
+        <p:style>
+          <a:lnRef idx="2">
+            <a:schemeClr val="accent1">
+              <a:shade val="50000"/>
+            </a:schemeClr>
+          </a:lnRef>
+          <a:fillRef idx="1">
+            <a:schemeClr val="accent1"/>
+          </a:fillRef>
+          <a:effectRef idx="0">
+            <a:schemeClr val="accent1"/>
+          </a:effectRef>
+          <a:fontRef idx="minor">
+            <a:schemeClr val="lt1"/>
+          </a:fontRef>
+        </p:style>
+        <p:txBody>
+          <a:bodyPr rtlCol="0" anchor="ctr"/>
+          <a:lstStyle/>
+          <a:p>
+            <a:pPr algn="ctr"/>
+            <a:endParaRPr lang="zh-CN" altLang="en-US">
+              <a:latin typeface="Times New Roman" panose="02020603050405020304" pitchFamily="18" charset="0"/>
+              <a:ea typeface="宋体" panose="02010600030101010101" pitchFamily="2" charset="-122"/>
+              <a:cs typeface="Times New Roman" panose="02020603050405020304" pitchFamily="18" charset="0"/>
+            </a:endParaRPr>
+          </a:p>
+        </p:txBody>
+      </p:sp>
+      <p:sp>
+        <p:nvSpPr>
+          <p:cNvPr id="3" name="矩形 2"/>
+          <p:cNvSpPr/>
+          <p:nvPr/>
+        </p:nvSpPr>
+        <p:spPr>
+          <a:xfrm>
+            <a:off x="2019300" y="1238251"/>
+            <a:ext cx="7058025" cy="476250"/>
+          </a:xfrm>
+          <a:prstGeom prst="rect">
+            <a:avLst/>
+          </a:prstGeom>
+          <a:noFill/>
+          <a:ln w="19050">
+            <a:solidFill>
+              <a:schemeClr val="tx1"/>
+            </a:solidFill>
+          </a:ln>
+        </p:spPr>
+        <p:style>
+          <a:lnRef idx="2">
+            <a:schemeClr val="accent1">
+              <a:shade val="50000"/>
+            </a:schemeClr>
+          </a:lnRef>
+          <a:fillRef idx="1">
+            <a:schemeClr val="accent1"/>
+          </a:fillRef>
+          <a:effectRef idx="0">
+            <a:schemeClr val="accent1"/>
+          </a:effectRef>
+          <a:fontRef idx="minor">
+            <a:schemeClr val="lt1"/>
+          </a:fontRef>
+        </p:style>
+        <p:txBody>
+          <a:bodyPr rtlCol="0" anchor="ctr"/>
+          <a:lstStyle/>
+          <a:p>
+            <a:pPr algn="ctr"/>
+            <a:endParaRPr lang="zh-CN" altLang="en-US">
+              <a:latin typeface="Times New Roman" panose="02020603050405020304" pitchFamily="18" charset="0"/>
+              <a:ea typeface="宋体" panose="02010600030101010101" pitchFamily="2" charset="-122"/>
+              <a:cs typeface="Times New Roman" panose="02020603050405020304" pitchFamily="18" charset="0"/>
+            </a:endParaRPr>
+          </a:p>
+        </p:txBody>
+      </p:sp>
+      <p:sp>
+        <p:nvSpPr>
+          <p:cNvPr id="23" name="矩形 22"/>
+          <p:cNvSpPr/>
+          <p:nvPr/>
+        </p:nvSpPr>
+        <p:spPr>
+          <a:xfrm>
+            <a:off x="2019299" y="2143126"/>
+            <a:ext cx="7058025" cy="476250"/>
+          </a:xfrm>
+          <a:prstGeom prst="rect">
+            <a:avLst/>
+          </a:prstGeom>
+          <a:noFill/>
+          <a:ln w="19050">
+            <a:solidFill>
+              <a:schemeClr val="tx1"/>
+            </a:solidFill>
+          </a:ln>
+        </p:spPr>
+        <p:style>
+          <a:lnRef idx="2">
+            <a:schemeClr val="accent1">
+              <a:shade val="50000"/>
+            </a:schemeClr>
+          </a:lnRef>
+          <a:fillRef idx="1">
+            <a:schemeClr val="accent1"/>
+          </a:fillRef>
+          <a:effectRef idx="0">
+            <a:schemeClr val="accent1"/>
+          </a:effectRef>
+          <a:fontRef idx="minor">
+            <a:schemeClr val="lt1"/>
+          </a:fontRef>
+        </p:style>
+        <p:txBody>
+          <a:bodyPr rtlCol="0" anchor="ctr"/>
+          <a:lstStyle/>
+          <a:p>
+            <a:pPr algn="ctr"/>
+            <a:endParaRPr lang="zh-CN" altLang="en-US">
+              <a:latin typeface="Times New Roman" panose="02020603050405020304" pitchFamily="18" charset="0"/>
+              <a:ea typeface="宋体" panose="02010600030101010101" pitchFamily="2" charset="-122"/>
+              <a:cs typeface="Times New Roman" panose="02020603050405020304" pitchFamily="18" charset="0"/>
+            </a:endParaRPr>
+          </a:p>
+        </p:txBody>
+      </p:sp>
+      <p:sp>
+        <p:nvSpPr>
+          <p:cNvPr id="24" name="矩形 23"/>
+          <p:cNvSpPr/>
+          <p:nvPr/>
+        </p:nvSpPr>
+        <p:spPr>
+          <a:xfrm>
+            <a:off x="2019298" y="3362326"/>
+            <a:ext cx="7058025" cy="476250"/>
+          </a:xfrm>
+          <a:prstGeom prst="rect">
+            <a:avLst/>
+          </a:prstGeom>
+          <a:noFill/>
+          <a:ln w="19050">
+            <a:solidFill>
+              <a:schemeClr val="tx1"/>
+            </a:solidFill>
+          </a:ln>
+        </p:spPr>
+        <p:style>
+          <a:lnRef idx="2">
+            <a:schemeClr val="accent1">
+              <a:shade val="50000"/>
+            </a:schemeClr>
+          </a:lnRef>
+          <a:fillRef idx="1">
+            <a:schemeClr val="accent1"/>
+          </a:fillRef>
+          <a:effectRef idx="0">
+            <a:schemeClr val="accent1"/>
+          </a:effectRef>
+          <a:fontRef idx="minor">
+            <a:schemeClr val="lt1"/>
+          </a:fontRef>
+        </p:style>
+        <p:txBody>
+          <a:bodyPr rtlCol="0" anchor="ctr"/>
+          <a:lstStyle/>
+          <a:p>
+            <a:pPr algn="ctr"/>
+            <a:endParaRPr lang="zh-CN" altLang="en-US">
+              <a:latin typeface="Times New Roman" panose="02020603050405020304" pitchFamily="18" charset="0"/>
+              <a:ea typeface="宋体" panose="02010600030101010101" pitchFamily="2" charset="-122"/>
+              <a:cs typeface="Times New Roman" panose="02020603050405020304" pitchFamily="18" charset="0"/>
+            </a:endParaRPr>
+          </a:p>
+        </p:txBody>
+      </p:sp>
+      <p:sp>
+        <p:nvSpPr>
+          <p:cNvPr id="4" name="文本框 3"/>
+          <p:cNvSpPr txBox="1"/>
+          <p:nvPr/>
+        </p:nvSpPr>
+        <p:spPr>
+          <a:xfrm>
+            <a:off x="1191825" y="1299903"/>
+            <a:ext cx="845103" cy="369332"/>
+          </a:xfrm>
+          <a:prstGeom prst="rect">
+            <a:avLst/>
+          </a:prstGeom>
+          <a:noFill/>
+        </p:spPr>
+        <p:txBody>
+          <a:bodyPr wrap="none" rtlCol="0">
+            <a:spAutoFit/>
+          </a:bodyPr>
+          <a:lstStyle/>
+          <a:p>
+            <a:r>
+              <a:rPr lang="en-US" altLang="zh-CN" b="1" dirty="0" smtClean="0">
+                <a:latin typeface="Times New Roman" panose="02020603050405020304" pitchFamily="18" charset="0"/>
+                <a:ea typeface="宋体" panose="02010600030101010101" pitchFamily="2" charset="-122"/>
+                <a:cs typeface="Times New Roman" panose="02020603050405020304" pitchFamily="18" charset="0"/>
+              </a:rPr>
+              <a:t>GPU 0</a:t>
+            </a:r>
+            <a:endParaRPr lang="zh-CN" altLang="en-US" b="1" dirty="0">
+              <a:latin typeface="Times New Roman" panose="02020603050405020304" pitchFamily="18" charset="0"/>
+              <a:ea typeface="宋体" panose="02010600030101010101" pitchFamily="2" charset="-122"/>
+              <a:cs typeface="Times New Roman" panose="02020603050405020304" pitchFamily="18" charset="0"/>
+            </a:endParaRPr>
+          </a:p>
+        </p:txBody>
+      </p:sp>
+      <p:sp>
+        <p:nvSpPr>
+          <p:cNvPr id="25" name="文本框 24"/>
+          <p:cNvSpPr txBox="1"/>
+          <p:nvPr/>
+        </p:nvSpPr>
+        <p:spPr>
+          <a:xfrm>
+            <a:off x="1191825" y="2191714"/>
+            <a:ext cx="845103" cy="369332"/>
+          </a:xfrm>
+          <a:prstGeom prst="rect">
+            <a:avLst/>
+          </a:prstGeom>
+          <a:noFill/>
+        </p:spPr>
+        <p:txBody>
+          <a:bodyPr wrap="none" rtlCol="0">
+            <a:spAutoFit/>
+          </a:bodyPr>
+          <a:lstStyle/>
+          <a:p>
+            <a:r>
+              <a:rPr lang="en-US" altLang="zh-CN" b="1" dirty="0" smtClean="0">
+                <a:latin typeface="Times New Roman" panose="02020603050405020304" pitchFamily="18" charset="0"/>
+                <a:ea typeface="宋体" panose="02010600030101010101" pitchFamily="2" charset="-122"/>
+                <a:cs typeface="Times New Roman" panose="02020603050405020304" pitchFamily="18" charset="0"/>
+              </a:rPr>
+              <a:t>GPU 1</a:t>
+            </a:r>
+            <a:endParaRPr lang="zh-CN" altLang="en-US" b="1" dirty="0">
+              <a:latin typeface="Times New Roman" panose="02020603050405020304" pitchFamily="18" charset="0"/>
+              <a:ea typeface="宋体" panose="02010600030101010101" pitchFamily="2" charset="-122"/>
+              <a:cs typeface="Times New Roman" panose="02020603050405020304" pitchFamily="18" charset="0"/>
+            </a:endParaRPr>
+          </a:p>
+        </p:txBody>
+      </p:sp>
+      <p:sp>
+        <p:nvSpPr>
+          <p:cNvPr id="26" name="文本框 25"/>
+          <p:cNvSpPr txBox="1"/>
+          <p:nvPr/>
+        </p:nvSpPr>
+        <p:spPr>
+          <a:xfrm>
+            <a:off x="1191825" y="3415785"/>
+            <a:ext cx="857927" cy="369332"/>
+          </a:xfrm>
+          <a:prstGeom prst="rect">
+            <a:avLst/>
+          </a:prstGeom>
+          <a:noFill/>
+        </p:spPr>
+        <p:txBody>
+          <a:bodyPr wrap="none" rtlCol="0">
+            <a:spAutoFit/>
+          </a:bodyPr>
+          <a:lstStyle/>
+          <a:p>
+            <a:r>
+              <a:rPr lang="en-US" altLang="zh-CN" b="1" dirty="0" smtClean="0">
+                <a:latin typeface="Times New Roman" panose="02020603050405020304" pitchFamily="18" charset="0"/>
+                <a:ea typeface="宋体" panose="02010600030101010101" pitchFamily="2" charset="-122"/>
+                <a:cs typeface="Times New Roman" panose="02020603050405020304" pitchFamily="18" charset="0"/>
+              </a:rPr>
+              <a:t>GPU n</a:t>
+            </a:r>
+            <a:endParaRPr lang="zh-CN" altLang="en-US" b="1" dirty="0">
+              <a:latin typeface="Times New Roman" panose="02020603050405020304" pitchFamily="18" charset="0"/>
+              <a:ea typeface="宋体" panose="02010600030101010101" pitchFamily="2" charset="-122"/>
+              <a:cs typeface="Times New Roman" panose="02020603050405020304" pitchFamily="18" charset="0"/>
+            </a:endParaRPr>
+          </a:p>
+        </p:txBody>
+      </p:sp>
+      <p:sp>
+        <p:nvSpPr>
+          <p:cNvPr id="5" name="文本框 4"/>
+          <p:cNvSpPr txBox="1"/>
+          <p:nvPr/>
+        </p:nvSpPr>
+        <p:spPr>
+          <a:xfrm>
+            <a:off x="3694588" y="2729882"/>
+            <a:ext cx="553998" cy="707886"/>
+          </a:xfrm>
+          <a:prstGeom prst="rect">
+            <a:avLst/>
+          </a:prstGeom>
+          <a:noFill/>
+        </p:spPr>
+        <p:txBody>
+          <a:bodyPr vert="eaVert" wrap="none" rtlCol="0">
+            <a:spAutoFit/>
+          </a:bodyPr>
+          <a:lstStyle/>
+          <a:p>
+            <a:r>
+              <a:rPr lang="en-AE" altLang="zh-CN" sz="2400" dirty="0" smtClean="0">
+                <a:latin typeface="Times New Roman" panose="02020603050405020304" pitchFamily="18" charset="0"/>
+                <a:ea typeface="宋体" panose="02010600030101010101" pitchFamily="2" charset="-122"/>
+                <a:cs typeface="Times New Roman" panose="02020603050405020304" pitchFamily="18" charset="0"/>
+              </a:rPr>
+              <a:t>……</a:t>
+            </a:r>
+            <a:endParaRPr lang="zh-CN" altLang="en-US" sz="2400" dirty="0">
+              <a:latin typeface="Times New Roman" panose="02020603050405020304" pitchFamily="18" charset="0"/>
+              <a:ea typeface="宋体" panose="02010600030101010101" pitchFamily="2" charset="-122"/>
+              <a:cs typeface="Times New Roman" panose="02020603050405020304" pitchFamily="18" charset="0"/>
+            </a:endParaRPr>
+          </a:p>
+        </p:txBody>
+      </p:sp>
+      <p:cxnSp>
+        <p:nvCxnSpPr>
+          <p:cNvPr id="9" name="直接连接符 8"/>
+          <p:cNvCxnSpPr/>
+          <p:nvPr/>
+        </p:nvCxnSpPr>
+        <p:spPr>
+          <a:xfrm>
+            <a:off x="2638426" y="1245604"/>
+            <a:ext cx="0" cy="2600325"/>
+          </a:xfrm>
+          <a:prstGeom prst="line">
+            <a:avLst/>
+          </a:prstGeom>
+          <a:ln w="19050">
+            <a:solidFill>
+              <a:schemeClr val="tx1"/>
+            </a:solidFill>
+            <a:prstDash val="dash"/>
+          </a:ln>
+        </p:spPr>
+        <p:style>
+          <a:lnRef idx="1">
+            <a:schemeClr val="accent1"/>
+          </a:lnRef>
+          <a:fillRef idx="0">
+            <a:schemeClr val="accent1"/>
+          </a:fillRef>
+          <a:effectRef idx="0">
+            <a:schemeClr val="accent1"/>
+          </a:effectRef>
+          <a:fontRef idx="minor">
+            <a:schemeClr val="tx1"/>
+          </a:fontRef>
+        </p:style>
+      </p:cxnSp>
+      <p:cxnSp>
+        <p:nvCxnSpPr>
+          <p:cNvPr id="34" name="直接连接符 33"/>
+          <p:cNvCxnSpPr/>
+          <p:nvPr/>
+        </p:nvCxnSpPr>
+        <p:spPr>
+          <a:xfrm>
+            <a:off x="5271311" y="1245604"/>
+            <a:ext cx="0" cy="2600325"/>
+          </a:xfrm>
+          <a:prstGeom prst="line">
+            <a:avLst/>
+          </a:prstGeom>
+          <a:ln w="19050">
+            <a:solidFill>
+              <a:schemeClr val="tx1"/>
+            </a:solidFill>
+            <a:prstDash val="dash"/>
+          </a:ln>
+        </p:spPr>
+        <p:style>
+          <a:lnRef idx="1">
+            <a:schemeClr val="accent1"/>
+          </a:lnRef>
+          <a:fillRef idx="0">
+            <a:schemeClr val="accent1"/>
+          </a:fillRef>
+          <a:effectRef idx="0">
+            <a:schemeClr val="accent1"/>
+          </a:effectRef>
+          <a:fontRef idx="minor">
+            <a:schemeClr val="tx1"/>
+          </a:fontRef>
+        </p:style>
+      </p:cxnSp>
+      <p:sp>
+        <p:nvSpPr>
+          <p:cNvPr id="10" name="左大括号 9"/>
+          <p:cNvSpPr/>
+          <p:nvPr/>
+        </p:nvSpPr>
+        <p:spPr>
+          <a:xfrm rot="-5400000">
+            <a:off x="5187696" y="1313537"/>
+            <a:ext cx="176756" cy="5256241"/>
+          </a:xfrm>
+          <a:prstGeom prst="leftBrace">
+            <a:avLst>
+              <a:gd name="adj1" fmla="val 68208"/>
+              <a:gd name="adj2" fmla="val 50000"/>
+            </a:avLst>
+          </a:prstGeom>
+          <a:noFill/>
+          <a:ln w="19050">
+            <a:solidFill>
+              <a:schemeClr val="tx1"/>
+            </a:solidFill>
+            <a:round/>
+          </a:ln>
+        </p:spPr>
+        <p:style>
+          <a:lnRef idx="1">
+            <a:schemeClr val="accent1"/>
+          </a:lnRef>
+          <a:fillRef idx="0">
+            <a:schemeClr val="accent1"/>
+          </a:fillRef>
+          <a:effectRef idx="0">
+            <a:schemeClr val="accent1"/>
+          </a:effectRef>
+          <a:fontRef idx="minor">
+            <a:schemeClr val="tx1"/>
+          </a:fontRef>
+        </p:style>
+        <p:txBody>
+          <a:bodyPr rtlCol="0" anchor="ctr"/>
+          <a:lstStyle/>
+          <a:p>
+            <a:pPr algn="ctr"/>
+            <a:endParaRPr lang="zh-CN" altLang="en-US">
+              <a:latin typeface="Times New Roman" panose="02020603050405020304" pitchFamily="18" charset="0"/>
+              <a:ea typeface="宋体" panose="02010600030101010101" pitchFamily="2" charset="-122"/>
+              <a:cs typeface="Times New Roman" panose="02020603050405020304" pitchFamily="18" charset="0"/>
+            </a:endParaRPr>
+          </a:p>
+        </p:txBody>
+      </p:sp>
+      <p:sp>
+        <p:nvSpPr>
+          <p:cNvPr id="39" name="左大括号 38"/>
+          <p:cNvSpPr/>
+          <p:nvPr/>
+        </p:nvSpPr>
+        <p:spPr>
+          <a:xfrm rot="16200000">
+            <a:off x="2245248" y="3627331"/>
+            <a:ext cx="176757" cy="628652"/>
+          </a:xfrm>
+          <a:prstGeom prst="leftBrace">
+            <a:avLst>
+              <a:gd name="adj1" fmla="val 24871"/>
+              <a:gd name="adj2" fmla="val 50000"/>
+            </a:avLst>
+          </a:prstGeom>
+          <a:noFill/>
+          <a:ln w="19050">
+            <a:solidFill>
+              <a:schemeClr val="tx1"/>
+            </a:solidFill>
+            <a:round/>
+          </a:ln>
+        </p:spPr>
+        <p:style>
+          <a:lnRef idx="1">
+            <a:schemeClr val="accent1"/>
+          </a:lnRef>
+          <a:fillRef idx="0">
+            <a:schemeClr val="accent1"/>
+          </a:fillRef>
+          <a:effectRef idx="0">
+            <a:schemeClr val="accent1"/>
+          </a:effectRef>
+          <a:fontRef idx="minor">
+            <a:schemeClr val="tx1"/>
+          </a:fontRef>
+        </p:style>
+        <p:txBody>
+          <a:bodyPr rtlCol="0" anchor="ctr"/>
+          <a:lstStyle/>
+          <a:p>
+            <a:pPr algn="ctr"/>
+            <a:endParaRPr lang="zh-CN" altLang="en-US">
+              <a:latin typeface="Times New Roman" panose="02020603050405020304" pitchFamily="18" charset="0"/>
+              <a:ea typeface="宋体" panose="02010600030101010101" pitchFamily="2" charset="-122"/>
+              <a:cs typeface="Times New Roman" panose="02020603050405020304" pitchFamily="18" charset="0"/>
+            </a:endParaRPr>
+          </a:p>
+        </p:txBody>
+      </p:sp>
+      <p:sp>
+        <p:nvSpPr>
+          <p:cNvPr id="45" name="左大括号 44"/>
+          <p:cNvSpPr/>
+          <p:nvPr/>
+        </p:nvSpPr>
+        <p:spPr>
+          <a:xfrm rot="16200000">
+            <a:off x="7270001" y="2222714"/>
+            <a:ext cx="176758" cy="3437886"/>
+          </a:xfrm>
+          <a:prstGeom prst="leftBrace">
+            <a:avLst>
+              <a:gd name="adj1" fmla="val 68208"/>
+              <a:gd name="adj2" fmla="val 50000"/>
+            </a:avLst>
+          </a:prstGeom>
+          <a:noFill/>
+          <a:ln w="19050">
+            <a:solidFill>
+              <a:schemeClr val="tx1"/>
+            </a:solidFill>
+            <a:round/>
+          </a:ln>
+        </p:spPr>
+        <p:style>
+          <a:lnRef idx="1">
+            <a:schemeClr val="accent1"/>
+          </a:lnRef>
+          <a:fillRef idx="0">
+            <a:schemeClr val="accent1"/>
+          </a:fillRef>
+          <a:effectRef idx="0">
+            <a:schemeClr val="accent1"/>
+          </a:effectRef>
+          <a:fontRef idx="minor">
+            <a:schemeClr val="tx1"/>
+          </a:fontRef>
+        </p:style>
+        <p:txBody>
+          <a:bodyPr rtlCol="0" anchor="ctr"/>
+          <a:lstStyle/>
+          <a:p>
+            <a:pPr algn="ctr"/>
+            <a:endParaRPr lang="zh-CN" altLang="en-US">
+              <a:latin typeface="Times New Roman" panose="02020603050405020304" pitchFamily="18" charset="0"/>
+              <a:ea typeface="宋体" panose="02010600030101010101" pitchFamily="2" charset="-122"/>
+              <a:cs typeface="Times New Roman" panose="02020603050405020304" pitchFamily="18" charset="0"/>
+            </a:endParaRPr>
+          </a:p>
+        </p:txBody>
+      </p:sp>
+      <p:graphicFrame>
+        <p:nvGraphicFramePr>
+          <p:cNvPr id="8" name="对象 7"/>
+          <p:cNvGraphicFramePr>
+            <a:graphicFrameLocks noChangeAspect="1"/>
+          </p:cNvGraphicFramePr>
+          <p:nvPr>
+            <p:extLst>
+              <p:ext uri="{D42A27DB-BD31-4B8C-83A1-F6EECF244321}">
+                <p14:modId xmlns:p14="http://schemas.microsoft.com/office/powerpoint/2010/main" val="4124268523"/>
+              </p:ext>
+            </p:extLst>
+          </p:nvPr>
+        </p:nvGraphicFramePr>
+        <p:xfrm>
+          <a:off x="2052436" y="4030036"/>
+          <a:ext cx="562382" cy="409005"/>
+        </p:xfrm>
+        <a:graphic>
+          <a:graphicData uri="http://schemas.openxmlformats.org/presentationml/2006/ole">
+            <mc:AlternateContent xmlns:mc="http://schemas.openxmlformats.org/markup-compatibility/2006">
+              <mc:Choice xmlns:v="urn:schemas-microsoft-com:vml" Requires="v">
+                <p:oleObj spid="_x0000_s1032" name="AxMath" r:id="rId3" imgW="315000" imgH="228600" progId="Equation.AxMath">
+                  <p:embed/>
+                </p:oleObj>
+              </mc:Choice>
+              <mc:Fallback>
+                <p:oleObj name="AxMath" r:id="rId3" imgW="315000" imgH="228600" progId="Equation.AxMath">
+                  <p:embed/>
+                  <p:pic>
+                    <p:nvPicPr>
+                      <p:cNvPr id="8" name="对象 7"/>
+                      <p:cNvPicPr/>
+                      <p:nvPr/>
+                    </p:nvPicPr>
+                    <p:blipFill>
+                      <a:blip r:embed="rId4"/>
+                      <a:stretch>
+                        <a:fillRect/>
+                      </a:stretch>
+                    </p:blipFill>
+                    <p:spPr>
+                      <a:xfrm>
+                        <a:off x="2052436" y="4030036"/>
+                        <a:ext cx="562382" cy="409005"/>
+                      </a:xfrm>
+                      <a:prstGeom prst="rect">
+                        <a:avLst/>
+                      </a:prstGeom>
+                    </p:spPr>
+                  </p:pic>
+                </p:oleObj>
+              </mc:Fallback>
+            </mc:AlternateContent>
+          </a:graphicData>
+        </a:graphic>
+      </p:graphicFrame>
+      <p:graphicFrame>
+        <p:nvGraphicFramePr>
+          <p:cNvPr id="33" name="对象 32"/>
+          <p:cNvGraphicFramePr>
+            <a:graphicFrameLocks noChangeAspect="1"/>
+          </p:cNvGraphicFramePr>
+          <p:nvPr>
+            <p:extLst>
+              <p:ext uri="{D42A27DB-BD31-4B8C-83A1-F6EECF244321}">
+                <p14:modId xmlns:p14="http://schemas.microsoft.com/office/powerpoint/2010/main" val="631936131"/>
+              </p:ext>
+            </p:extLst>
+          </p:nvPr>
+        </p:nvGraphicFramePr>
+        <p:xfrm>
+          <a:off x="4968875" y="4030663"/>
+          <a:ext cx="623888" cy="407987"/>
+        </p:xfrm>
+        <a:graphic>
+          <a:graphicData uri="http://schemas.openxmlformats.org/presentationml/2006/ole">
+            <mc:AlternateContent xmlns:mc="http://schemas.openxmlformats.org/markup-compatibility/2006">
+              <mc:Choice xmlns:v="urn:schemas-microsoft-com:vml" Requires="v">
+                <p:oleObj spid="_x0000_s1033" name="AxMath" r:id="rId5" imgW="347760" imgH="228600" progId="Equation.AxMath">
+                  <p:embed/>
+                </p:oleObj>
+              </mc:Choice>
+              <mc:Fallback>
+                <p:oleObj name="AxMath" r:id="rId5" imgW="347760" imgH="228600" progId="Equation.AxMath">
+                  <p:embed/>
+                  <p:pic>
+                    <p:nvPicPr>
+                      <p:cNvPr id="33" name="对象 32"/>
+                      <p:cNvPicPr/>
+                      <p:nvPr/>
+                    </p:nvPicPr>
+                    <p:blipFill>
+                      <a:blip r:embed="rId6"/>
+                      <a:stretch>
+                        <a:fillRect/>
+                      </a:stretch>
+                    </p:blipFill>
+                    <p:spPr>
+                      <a:xfrm>
+                        <a:off x="4968875" y="4030663"/>
+                        <a:ext cx="623888" cy="407987"/>
+                      </a:xfrm>
+                      <a:prstGeom prst="rect">
+                        <a:avLst/>
+                      </a:prstGeom>
+                    </p:spPr>
+                  </p:pic>
+                </p:oleObj>
+              </mc:Fallback>
+            </mc:AlternateContent>
+          </a:graphicData>
+        </a:graphic>
+      </p:graphicFrame>
+      <p:graphicFrame>
+        <p:nvGraphicFramePr>
+          <p:cNvPr id="38" name="对象 37"/>
+          <p:cNvGraphicFramePr>
+            <a:graphicFrameLocks noChangeAspect="1"/>
+          </p:cNvGraphicFramePr>
+          <p:nvPr>
+            <p:extLst>
+              <p:ext uri="{D42A27DB-BD31-4B8C-83A1-F6EECF244321}">
+                <p14:modId xmlns:p14="http://schemas.microsoft.com/office/powerpoint/2010/main" val="2221046946"/>
+              </p:ext>
+            </p:extLst>
+          </p:nvPr>
+        </p:nvGraphicFramePr>
+        <p:xfrm>
+          <a:off x="7019925" y="4030663"/>
+          <a:ext cx="677863" cy="407987"/>
+        </p:xfrm>
+        <a:graphic>
+          <a:graphicData uri="http://schemas.openxmlformats.org/presentationml/2006/ole">
+            <mc:AlternateContent xmlns:mc="http://schemas.openxmlformats.org/markup-compatibility/2006">
+              <mc:Choice xmlns:v="urn:schemas-microsoft-com:vml" Requires="v">
+                <p:oleObj spid="_x0000_s1034" name="AxMath" r:id="rId7" imgW="378000" imgH="228600" progId="Equation.AxMath">
+                  <p:embed/>
+                </p:oleObj>
+              </mc:Choice>
+              <mc:Fallback>
+                <p:oleObj name="AxMath" r:id="rId7" imgW="378000" imgH="228600" progId="Equation.AxMath">
+                  <p:embed/>
+                  <p:pic>
+                    <p:nvPicPr>
+                      <p:cNvPr id="38" name="对象 37"/>
+                      <p:cNvPicPr/>
+                      <p:nvPr/>
+                    </p:nvPicPr>
+                    <p:blipFill>
+                      <a:blip r:embed="rId8"/>
+                      <a:stretch>
+                        <a:fillRect/>
+                      </a:stretch>
+                    </p:blipFill>
+                    <p:spPr>
+                      <a:xfrm>
+                        <a:off x="7019925" y="4030663"/>
+                        <a:ext cx="677863" cy="407987"/>
+                      </a:xfrm>
+                      <a:prstGeom prst="rect">
+                        <a:avLst/>
+                      </a:prstGeom>
+                    </p:spPr>
+                  </p:pic>
+                </p:oleObj>
+              </mc:Fallback>
+            </mc:AlternateContent>
+          </a:graphicData>
+        </a:graphic>
+      </p:graphicFrame>
+      <p:sp>
+        <p:nvSpPr>
+          <p:cNvPr id="42" name="矩形 41"/>
+          <p:cNvSpPr/>
+          <p:nvPr/>
+        </p:nvSpPr>
+        <p:spPr>
+          <a:xfrm>
+            <a:off x="2051483" y="4576471"/>
+            <a:ext cx="589109" cy="210124"/>
+          </a:xfrm>
+          <a:prstGeom prst="rect">
+            <a:avLst/>
+          </a:prstGeom>
+          <a:solidFill>
+            <a:schemeClr val="bg2">
+              <a:lumMod val="90000"/>
+            </a:schemeClr>
+          </a:solidFill>
+          <a:ln>
+            <a:solidFill>
+              <a:schemeClr val="bg2">
+                <a:lumMod val="90000"/>
+              </a:schemeClr>
+            </a:solidFill>
+          </a:ln>
+        </p:spPr>
+        <p:style>
+          <a:lnRef idx="2">
+            <a:schemeClr val="accent1">
+              <a:shade val="50000"/>
+            </a:schemeClr>
+          </a:lnRef>
+          <a:fillRef idx="1">
+            <a:schemeClr val="accent1"/>
+          </a:fillRef>
+          <a:effectRef idx="0">
+            <a:schemeClr val="accent1"/>
+          </a:effectRef>
+          <a:fontRef idx="minor">
+            <a:schemeClr val="lt1"/>
+          </a:fontRef>
+        </p:style>
+        <p:txBody>
+          <a:bodyPr rtlCol="0" anchor="ctr"/>
+          <a:lstStyle/>
+          <a:p>
+            <a:pPr algn="ctr"/>
+            <a:endParaRPr lang="zh-CN" altLang="en-US" sz="1600" dirty="0">
+              <a:latin typeface="Times New Roman" panose="02020603050405020304" pitchFamily="18" charset="0"/>
+              <a:ea typeface="宋体" panose="02010600030101010101" pitchFamily="2" charset="-122"/>
+              <a:cs typeface="Times New Roman" panose="02020603050405020304" pitchFamily="18" charset="0"/>
+            </a:endParaRPr>
+          </a:p>
+        </p:txBody>
+      </p:sp>
+      <p:sp>
+        <p:nvSpPr>
+          <p:cNvPr id="12" name="文本框 11"/>
+          <p:cNvSpPr txBox="1"/>
+          <p:nvPr/>
+        </p:nvSpPr>
+        <p:spPr>
+          <a:xfrm>
+            <a:off x="2680484" y="4511291"/>
+            <a:ext cx="1005403" cy="338554"/>
+          </a:xfrm>
+          <a:prstGeom prst="rect">
+            <a:avLst/>
+          </a:prstGeom>
+          <a:noFill/>
+        </p:spPr>
+        <p:txBody>
+          <a:bodyPr wrap="none" rtlCol="0">
+            <a:spAutoFit/>
+          </a:bodyPr>
+          <a:lstStyle/>
+          <a:p>
+            <a:r>
+              <a:rPr lang="zh-CN" altLang="en-US" sz="1600" b="1" dirty="0" smtClean="0">
+                <a:latin typeface="Times New Roman" panose="02020603050405020304" pitchFamily="18" charset="0"/>
+                <a:ea typeface="宋体" panose="02010600030101010101" pitchFamily="2" charset="-122"/>
+                <a:cs typeface="Times New Roman" panose="02020603050405020304" pitchFamily="18" charset="0"/>
+              </a:rPr>
+              <a:t>数据拷贝</a:t>
+            </a:r>
+            <a:endParaRPr lang="zh-CN" altLang="en-US" sz="1600" b="1" dirty="0">
+              <a:latin typeface="Times New Roman" panose="02020603050405020304" pitchFamily="18" charset="0"/>
+              <a:ea typeface="宋体" panose="02010600030101010101" pitchFamily="2" charset="-122"/>
+              <a:cs typeface="Times New Roman" panose="02020603050405020304" pitchFamily="18" charset="0"/>
+            </a:endParaRPr>
+          </a:p>
+        </p:txBody>
+      </p:sp>
+      <p:sp>
+        <p:nvSpPr>
+          <p:cNvPr id="43" name="矩形 42"/>
+          <p:cNvSpPr/>
+          <p:nvPr/>
+        </p:nvSpPr>
+        <p:spPr>
+          <a:xfrm>
+            <a:off x="3971587" y="4576471"/>
+            <a:ext cx="589109" cy="210124"/>
+          </a:xfrm>
+          <a:prstGeom prst="rect">
+            <a:avLst/>
+          </a:prstGeom>
+          <a:solidFill>
+            <a:srgbClr val="F4B183"/>
+          </a:solidFill>
+          <a:ln>
+            <a:solidFill>
+              <a:srgbClr val="F4B183"/>
+            </a:solidFill>
+          </a:ln>
+        </p:spPr>
+        <p:style>
+          <a:lnRef idx="2">
+            <a:schemeClr val="accent1">
+              <a:shade val="50000"/>
+            </a:schemeClr>
+          </a:lnRef>
+          <a:fillRef idx="1">
+            <a:schemeClr val="accent1"/>
+          </a:fillRef>
+          <a:effectRef idx="0">
+            <a:schemeClr val="accent1"/>
+          </a:effectRef>
+          <a:fontRef idx="minor">
+            <a:schemeClr val="lt1"/>
+          </a:fontRef>
+        </p:style>
+        <p:txBody>
+          <a:bodyPr rtlCol="0" anchor="ctr"/>
+          <a:lstStyle/>
+          <a:p>
+            <a:pPr algn="ctr"/>
+            <a:endParaRPr lang="zh-CN" altLang="en-US" sz="1600" dirty="0">
+              <a:latin typeface="Times New Roman" panose="02020603050405020304" pitchFamily="18" charset="0"/>
+              <a:ea typeface="宋体" panose="02010600030101010101" pitchFamily="2" charset="-122"/>
+              <a:cs typeface="Times New Roman" panose="02020603050405020304" pitchFamily="18" charset="0"/>
+            </a:endParaRPr>
+          </a:p>
+        </p:txBody>
+      </p:sp>
+      <p:sp>
+        <p:nvSpPr>
+          <p:cNvPr id="44" name="文本框 43"/>
+          <p:cNvSpPr txBox="1"/>
+          <p:nvPr/>
+        </p:nvSpPr>
+        <p:spPr>
+          <a:xfrm>
+            <a:off x="4600588" y="4511291"/>
+            <a:ext cx="1415772" cy="338554"/>
+          </a:xfrm>
+          <a:prstGeom prst="rect">
+            <a:avLst/>
+          </a:prstGeom>
+          <a:noFill/>
+        </p:spPr>
+        <p:txBody>
+          <a:bodyPr wrap="none" rtlCol="0">
+            <a:spAutoFit/>
+          </a:bodyPr>
+          <a:lstStyle/>
+          <a:p>
+            <a:r>
+              <a:rPr lang="zh-CN" altLang="en-US" sz="1600" b="1" dirty="0" smtClean="0">
+                <a:latin typeface="Times New Roman" panose="02020603050405020304" pitchFamily="18" charset="0"/>
+                <a:ea typeface="宋体" panose="02010600030101010101" pitchFamily="2" charset="-122"/>
+                <a:cs typeface="Times New Roman" panose="02020603050405020304" pitchFamily="18" charset="0"/>
+              </a:rPr>
+              <a:t>节点本地计算</a:t>
+            </a:r>
+            <a:endParaRPr lang="zh-CN" altLang="en-US" sz="1600" b="1" dirty="0">
+              <a:latin typeface="Times New Roman" panose="02020603050405020304" pitchFamily="18" charset="0"/>
+              <a:ea typeface="宋体" panose="02010600030101010101" pitchFamily="2" charset="-122"/>
+              <a:cs typeface="Times New Roman" panose="02020603050405020304" pitchFamily="18" charset="0"/>
+            </a:endParaRPr>
+          </a:p>
+        </p:txBody>
+      </p:sp>
+      <p:sp>
+        <p:nvSpPr>
+          <p:cNvPr id="47" name="矩形 46"/>
+          <p:cNvSpPr/>
+          <p:nvPr/>
+        </p:nvSpPr>
+        <p:spPr>
+          <a:xfrm>
+            <a:off x="6298200" y="4576471"/>
+            <a:ext cx="589109" cy="210124"/>
+          </a:xfrm>
+          <a:prstGeom prst="rect">
+            <a:avLst/>
+          </a:prstGeom>
+          <a:solidFill>
+            <a:srgbClr val="9DC3E6"/>
+          </a:solidFill>
+          <a:ln>
+            <a:solidFill>
+              <a:srgbClr val="9DC3E6"/>
+            </a:solidFill>
+          </a:ln>
+        </p:spPr>
+        <p:style>
+          <a:lnRef idx="2">
+            <a:schemeClr val="accent1">
+              <a:shade val="50000"/>
+            </a:schemeClr>
+          </a:lnRef>
+          <a:fillRef idx="1">
+            <a:schemeClr val="accent1"/>
+          </a:fillRef>
+          <a:effectRef idx="0">
+            <a:schemeClr val="accent1"/>
+          </a:effectRef>
+          <a:fontRef idx="minor">
+            <a:schemeClr val="lt1"/>
+          </a:fontRef>
+        </p:style>
+        <p:txBody>
+          <a:bodyPr rtlCol="0" anchor="ctr"/>
+          <a:lstStyle/>
+          <a:p>
+            <a:pPr algn="ctr"/>
+            <a:endParaRPr lang="zh-CN" altLang="en-US" sz="1600" dirty="0">
+              <a:latin typeface="Times New Roman" panose="02020603050405020304" pitchFamily="18" charset="0"/>
+              <a:ea typeface="宋体" panose="02010600030101010101" pitchFamily="2" charset="-122"/>
+              <a:cs typeface="Times New Roman" panose="02020603050405020304" pitchFamily="18" charset="0"/>
+            </a:endParaRPr>
+          </a:p>
+        </p:txBody>
+      </p:sp>
+      <p:sp>
+        <p:nvSpPr>
+          <p:cNvPr id="48" name="文本框 47"/>
+          <p:cNvSpPr txBox="1"/>
+          <p:nvPr/>
+        </p:nvSpPr>
+        <p:spPr>
+          <a:xfrm>
+            <a:off x="6887309" y="4511291"/>
+            <a:ext cx="2031325" cy="338554"/>
+          </a:xfrm>
+          <a:prstGeom prst="rect">
+            <a:avLst/>
+          </a:prstGeom>
+          <a:noFill/>
+        </p:spPr>
+        <p:txBody>
+          <a:bodyPr wrap="none" rtlCol="0">
+            <a:spAutoFit/>
+          </a:bodyPr>
+          <a:lstStyle/>
+          <a:p>
+            <a:r>
+              <a:rPr lang="zh-CN" altLang="en-US" sz="1600" b="1" dirty="0" smtClean="0">
+                <a:latin typeface="Times New Roman" panose="02020603050405020304" pitchFamily="18" charset="0"/>
+                <a:ea typeface="宋体" panose="02010600030101010101" pitchFamily="2" charset="-122"/>
+                <a:cs typeface="Times New Roman" panose="02020603050405020304" pitchFamily="18" charset="0"/>
+              </a:rPr>
+              <a:t>节点之间的数据通信</a:t>
+            </a:r>
+            <a:endParaRPr lang="zh-CN" altLang="en-US" sz="1600" b="1" dirty="0">
+              <a:latin typeface="Times New Roman" panose="02020603050405020304" pitchFamily="18" charset="0"/>
+              <a:ea typeface="宋体" panose="02010600030101010101" pitchFamily="2" charset="-122"/>
+              <a:cs typeface="Times New Roman" panose="02020603050405020304" pitchFamily="18" charset="0"/>
+            </a:endParaRPr>
+          </a:p>
+        </p:txBody>
+      </p:sp>
+      <p:sp>
+        <p:nvSpPr>
+          <p:cNvPr id="40" name="矩形 39"/>
+          <p:cNvSpPr/>
+          <p:nvPr/>
+        </p:nvSpPr>
+        <p:spPr>
+          <a:xfrm>
+            <a:off x="5639435" y="2637557"/>
+            <a:ext cx="3437888" cy="428624"/>
+          </a:xfrm>
+          <a:prstGeom prst="rect">
+            <a:avLst/>
+          </a:prstGeom>
+          <a:solidFill>
+            <a:schemeClr val="accent1">
+              <a:lumMod val="60000"/>
+              <a:lumOff val="40000"/>
+            </a:schemeClr>
+          </a:solidFill>
+          <a:ln>
+            <a:solidFill>
               <a:schemeClr val="accent1">
-                <a:shade val="50000"/>
+                <a:lumMod val="60000"/>
+                <a:lumOff val="40000"/>
               </a:schemeClr>
-            </a:lnRef>
-            <a:fillRef idx="1">
-              <a:schemeClr val="accent1"/>
-            </a:fillRef>
-            <a:effectRef idx="0">
-              <a:schemeClr val="accent1"/>
-            </a:effectRef>
-            <a:fontRef idx="minor">
-              <a:schemeClr val="lt1"/>
-            </a:fontRef>
-          </p:style>
-          <p:txBody>
-            <a:bodyPr rtlCol="0" anchor="ctr"/>
-            <a:lstStyle/>
-            <a:p>
-              <a:pPr algn="ctr"/>
-              <a:r>
-                <a:rPr lang="zh-CN" altLang="en-US" sz="1600" b="1" dirty="0" smtClean="0">
-                  <a:solidFill>
-                    <a:schemeClr val="tx1"/>
-                  </a:solidFill>
-                </a:rPr>
-                <a:t>计算时间</a:t>
-              </a:r>
-              <a:endParaRPr lang="zh-CN" altLang="en-US" sz="1600" b="1" dirty="0">
-                <a:solidFill>
-                  <a:schemeClr val="tx1"/>
-                </a:solidFill>
-              </a:endParaRPr>
-            </a:p>
-          </p:txBody>
-        </p:sp>
-        <p:sp>
-          <p:nvSpPr>
-            <p:cNvPr id="10" name="文本框 9"/>
-            <p:cNvSpPr txBox="1"/>
-            <p:nvPr/>
-          </p:nvSpPr>
-          <p:spPr>
-            <a:xfrm>
-              <a:off x="1466197" y="3619224"/>
-              <a:ext cx="1005403" cy="338554"/>
-            </a:xfrm>
-            <a:prstGeom prst="rect">
-              <a:avLst/>
-            </a:prstGeom>
-            <a:noFill/>
-          </p:spPr>
-          <p:txBody>
-            <a:bodyPr wrap="none" rtlCol="0">
-              <a:spAutoFit/>
-            </a:bodyPr>
-            <a:lstStyle/>
-            <a:p>
-              <a:r>
-                <a:rPr lang="zh-CN" altLang="en-US" sz="1600" dirty="0" smtClean="0"/>
-                <a:t>性能预测</a:t>
-              </a:r>
-              <a:endParaRPr lang="zh-CN" altLang="en-US" sz="1600" dirty="0"/>
-            </a:p>
-          </p:txBody>
-        </p:sp>
-        <p:sp>
-          <p:nvSpPr>
-            <p:cNvPr id="33" name="矩形 32"/>
-            <p:cNvSpPr/>
-            <p:nvPr/>
-          </p:nvSpPr>
-          <p:spPr>
-            <a:xfrm>
-              <a:off x="1893177" y="4749257"/>
-              <a:ext cx="1090441" cy="388761"/>
-            </a:xfrm>
-            <a:prstGeom prst="rect">
-              <a:avLst/>
-            </a:prstGeom>
-            <a:noFill/>
-            <a:ln w="19050">
-              <a:solidFill>
-                <a:schemeClr val="tx1"/>
-              </a:solidFill>
-            </a:ln>
-          </p:spPr>
-          <p:style>
-            <a:lnRef idx="2">
-              <a:schemeClr val="accent1">
-                <a:shade val="50000"/>
-              </a:schemeClr>
-            </a:lnRef>
-            <a:fillRef idx="1">
-              <a:schemeClr val="accent1"/>
-            </a:fillRef>
-            <a:effectRef idx="0">
-              <a:schemeClr val="accent1"/>
-            </a:effectRef>
-            <a:fontRef idx="minor">
-              <a:schemeClr val="lt1"/>
-            </a:fontRef>
-          </p:style>
-          <p:txBody>
-            <a:bodyPr rtlCol="0" anchor="ctr"/>
-            <a:lstStyle/>
-            <a:p>
-              <a:pPr algn="ctr"/>
-              <a:r>
-                <a:rPr lang="zh-CN" altLang="en-US" sz="1600" b="1" dirty="0" smtClean="0">
-                  <a:solidFill>
-                    <a:schemeClr val="tx1"/>
-                  </a:solidFill>
-                </a:rPr>
-                <a:t>种群分布</a:t>
-              </a:r>
-              <a:endParaRPr lang="zh-CN" altLang="en-US" sz="1600" b="1" dirty="0">
-                <a:solidFill>
-                  <a:schemeClr val="tx1"/>
-                </a:solidFill>
-              </a:endParaRPr>
-            </a:p>
-          </p:txBody>
-        </p:sp>
-        <p:cxnSp>
-          <p:nvCxnSpPr>
-            <p:cNvPr id="34" name="直接箭头连接符 33"/>
-            <p:cNvCxnSpPr>
-              <a:stCxn id="27" idx="2"/>
-              <a:endCxn id="28" idx="0"/>
-            </p:cNvCxnSpPr>
-            <p:nvPr/>
-          </p:nvCxnSpPr>
-          <p:spPr>
-            <a:xfrm>
-              <a:off x="2430092" y="3587438"/>
-              <a:ext cx="8307" cy="388314"/>
-            </a:xfrm>
-            <a:prstGeom prst="straightConnector1">
-              <a:avLst/>
-            </a:prstGeom>
-            <a:ln w="19050">
-              <a:solidFill>
-                <a:schemeClr val="tx1"/>
-              </a:solidFill>
-              <a:tailEnd type="triangle"/>
-            </a:ln>
-          </p:spPr>
-          <p:style>
-            <a:lnRef idx="1">
-              <a:schemeClr val="accent1"/>
-            </a:lnRef>
-            <a:fillRef idx="0">
-              <a:schemeClr val="accent1"/>
-            </a:fillRef>
-            <a:effectRef idx="0">
-              <a:schemeClr val="accent1"/>
-            </a:effectRef>
-            <a:fontRef idx="minor">
-              <a:schemeClr val="tx1"/>
-            </a:fontRef>
-          </p:style>
-        </p:cxnSp>
-        <p:sp>
-          <p:nvSpPr>
-            <p:cNvPr id="37" name="文本框 36"/>
-            <p:cNvSpPr txBox="1"/>
-            <p:nvPr/>
-          </p:nvSpPr>
-          <p:spPr>
-            <a:xfrm>
-              <a:off x="1269027" y="4387608"/>
-              <a:ext cx="1202573" cy="338554"/>
-            </a:xfrm>
-            <a:prstGeom prst="rect">
-              <a:avLst/>
-            </a:prstGeom>
-            <a:noFill/>
-          </p:spPr>
-          <p:txBody>
-            <a:bodyPr wrap="none" rtlCol="0">
-              <a:spAutoFit/>
-            </a:bodyPr>
-            <a:lstStyle/>
-            <a:p>
-              <a:pPr algn="ctr"/>
-              <a:r>
-                <a:rPr lang="zh-CN" altLang="en-US" sz="1600" dirty="0" smtClean="0"/>
-                <a:t>核密度估计</a:t>
-              </a:r>
-              <a:endParaRPr lang="zh-CN" altLang="en-US" sz="1600" dirty="0"/>
-            </a:p>
-          </p:txBody>
-        </p:sp>
-        <p:sp>
-          <p:nvSpPr>
-            <p:cNvPr id="15" name="矩形 14"/>
-            <p:cNvSpPr/>
-            <p:nvPr/>
-          </p:nvSpPr>
-          <p:spPr>
-            <a:xfrm>
-              <a:off x="933061" y="2680988"/>
-              <a:ext cx="2917372" cy="3470989"/>
-            </a:xfrm>
-            <a:prstGeom prst="rect">
-              <a:avLst/>
-            </a:prstGeom>
-            <a:noFill/>
-            <a:ln w="19050">
-              <a:solidFill>
-                <a:schemeClr val="tx1"/>
-              </a:solidFill>
-              <a:prstDash val="dash"/>
-            </a:ln>
-          </p:spPr>
-          <p:style>
-            <a:lnRef idx="2">
-              <a:schemeClr val="accent1">
-                <a:shade val="50000"/>
-              </a:schemeClr>
-            </a:lnRef>
-            <a:fillRef idx="1">
-              <a:schemeClr val="accent1"/>
-            </a:fillRef>
-            <a:effectRef idx="0">
-              <a:schemeClr val="accent1"/>
-            </a:effectRef>
-            <a:fontRef idx="minor">
-              <a:schemeClr val="lt1"/>
-            </a:fontRef>
-          </p:style>
-          <p:txBody>
-            <a:bodyPr rtlCol="0" anchor="ctr"/>
-            <a:lstStyle/>
-            <a:p>
-              <a:pPr algn="ctr"/>
-              <a:endParaRPr lang="zh-CN" altLang="en-US" dirty="0"/>
-            </a:p>
-          </p:txBody>
-        </p:sp>
-        <p:sp>
-          <p:nvSpPr>
-            <p:cNvPr id="16" name="文本框 15"/>
-            <p:cNvSpPr txBox="1"/>
-            <p:nvPr/>
-          </p:nvSpPr>
-          <p:spPr>
-            <a:xfrm>
-              <a:off x="1730514" y="2759009"/>
-              <a:ext cx="1415772" cy="338554"/>
-            </a:xfrm>
-            <a:prstGeom prst="rect">
-              <a:avLst/>
-            </a:prstGeom>
-            <a:noFill/>
-          </p:spPr>
-          <p:txBody>
-            <a:bodyPr wrap="none" rtlCol="0">
-              <a:spAutoFit/>
-            </a:bodyPr>
-            <a:lstStyle/>
-            <a:p>
-              <a:r>
-                <a:rPr lang="zh-CN" altLang="en-US" sz="1600" b="1" dirty="0" smtClean="0">
-                  <a:solidFill>
-                    <a:schemeClr val="accent1">
-                      <a:lumMod val="50000"/>
-                    </a:schemeClr>
-                  </a:solidFill>
-                </a:rPr>
-                <a:t>亲本网络采样</a:t>
-              </a:r>
-              <a:endParaRPr lang="zh-CN" altLang="en-US" sz="1600" b="1" dirty="0">
-                <a:solidFill>
-                  <a:schemeClr val="accent1">
-                    <a:lumMod val="50000"/>
-                  </a:schemeClr>
-                </a:solidFill>
-              </a:endParaRPr>
-            </a:p>
-          </p:txBody>
-        </p:sp>
-        <p:cxnSp>
-          <p:nvCxnSpPr>
-            <p:cNvPr id="48" name="直接箭头连接符 47"/>
-            <p:cNvCxnSpPr>
-              <a:stCxn id="28" idx="2"/>
-              <a:endCxn id="33" idx="0"/>
-            </p:cNvCxnSpPr>
-            <p:nvPr/>
-          </p:nvCxnSpPr>
-          <p:spPr>
-            <a:xfrm flipH="1">
-              <a:off x="2438398" y="4364513"/>
-              <a:ext cx="1" cy="384744"/>
-            </a:xfrm>
-            <a:prstGeom prst="straightConnector1">
-              <a:avLst/>
-            </a:prstGeom>
-            <a:ln w="19050">
-              <a:solidFill>
-                <a:schemeClr val="tx1"/>
-              </a:solidFill>
-              <a:tailEnd type="triangle"/>
-            </a:ln>
-          </p:spPr>
-          <p:style>
-            <a:lnRef idx="1">
-              <a:schemeClr val="accent1"/>
-            </a:lnRef>
-            <a:fillRef idx="0">
-              <a:schemeClr val="accent1"/>
-            </a:fillRef>
-            <a:effectRef idx="0">
-              <a:schemeClr val="accent1"/>
-            </a:effectRef>
-            <a:fontRef idx="minor">
-              <a:schemeClr val="tx1"/>
-            </a:fontRef>
-          </p:style>
-        </p:cxnSp>
-        <p:sp>
-          <p:nvSpPr>
-            <p:cNvPr id="53" name="矩形 52"/>
-            <p:cNvSpPr/>
-            <p:nvPr/>
-          </p:nvSpPr>
-          <p:spPr>
-            <a:xfrm>
-              <a:off x="1483564" y="5509366"/>
-              <a:ext cx="1909666" cy="468361"/>
-            </a:xfrm>
-            <a:prstGeom prst="rect">
-              <a:avLst/>
-            </a:prstGeom>
-            <a:noFill/>
-            <a:ln w="19050">
-              <a:solidFill>
-                <a:schemeClr val="tx1"/>
-              </a:solidFill>
-            </a:ln>
-          </p:spPr>
-          <p:style>
-            <a:lnRef idx="2">
-              <a:schemeClr val="accent1">
-                <a:shade val="50000"/>
-              </a:schemeClr>
-            </a:lnRef>
-            <a:fillRef idx="1">
-              <a:schemeClr val="accent1"/>
-            </a:fillRef>
-            <a:effectRef idx="0">
-              <a:schemeClr val="accent1"/>
-            </a:effectRef>
-            <a:fontRef idx="minor">
-              <a:schemeClr val="lt1"/>
-            </a:fontRef>
-          </p:style>
-          <p:txBody>
-            <a:bodyPr rtlCol="0" anchor="ctr"/>
-            <a:lstStyle/>
-            <a:p>
-              <a:pPr algn="ctr"/>
-              <a:r>
-                <a:rPr lang="zh-CN" altLang="en-US" sz="1600" b="1" dirty="0" smtClean="0">
-                  <a:solidFill>
-                    <a:schemeClr val="tx1"/>
-                  </a:solidFill>
-                </a:rPr>
-                <a:t>低密度区域的亲本</a:t>
-              </a:r>
-              <a:endParaRPr lang="zh-CN" altLang="en-US" sz="1600" b="1" dirty="0">
-                <a:solidFill>
-                  <a:schemeClr val="tx1"/>
-                </a:solidFill>
-              </a:endParaRPr>
-            </a:p>
-          </p:txBody>
-        </p:sp>
-        <p:cxnSp>
-          <p:nvCxnSpPr>
-            <p:cNvPr id="54" name="直接箭头连接符 53"/>
-            <p:cNvCxnSpPr>
-              <a:stCxn id="33" idx="2"/>
-              <a:endCxn id="53" idx="0"/>
-            </p:cNvCxnSpPr>
-            <p:nvPr/>
-          </p:nvCxnSpPr>
-          <p:spPr>
-            <a:xfrm flipH="1">
-              <a:off x="2438397" y="5138018"/>
-              <a:ext cx="1" cy="371348"/>
-            </a:xfrm>
-            <a:prstGeom prst="straightConnector1">
-              <a:avLst/>
-            </a:prstGeom>
-            <a:ln w="19050">
-              <a:solidFill>
-                <a:schemeClr val="tx1"/>
-              </a:solidFill>
-              <a:tailEnd type="triangle"/>
-            </a:ln>
-          </p:spPr>
-          <p:style>
-            <a:lnRef idx="1">
-              <a:schemeClr val="accent1"/>
-            </a:lnRef>
-            <a:fillRef idx="0">
-              <a:schemeClr val="accent1"/>
-            </a:fillRef>
-            <a:effectRef idx="0">
-              <a:schemeClr val="accent1"/>
-            </a:effectRef>
-            <a:fontRef idx="minor">
-              <a:schemeClr val="tx1"/>
-            </a:fontRef>
-          </p:style>
-        </p:cxnSp>
-        <p:sp>
-          <p:nvSpPr>
-            <p:cNvPr id="57" name="文本框 56"/>
-            <p:cNvSpPr txBox="1"/>
-            <p:nvPr/>
-          </p:nvSpPr>
-          <p:spPr>
-            <a:xfrm>
-              <a:off x="1876564" y="5173967"/>
-              <a:ext cx="595036" cy="338554"/>
-            </a:xfrm>
-            <a:prstGeom prst="rect">
-              <a:avLst/>
-            </a:prstGeom>
-            <a:noFill/>
-          </p:spPr>
-          <p:txBody>
-            <a:bodyPr wrap="none" rtlCol="0">
-              <a:spAutoFit/>
-            </a:bodyPr>
-            <a:lstStyle/>
-            <a:p>
-              <a:pPr algn="ctr"/>
-              <a:r>
-                <a:rPr lang="zh-CN" altLang="en-US" sz="1600" dirty="0" smtClean="0"/>
-                <a:t>采样</a:t>
-              </a:r>
-              <a:endParaRPr lang="zh-CN" altLang="en-US" sz="1600" dirty="0"/>
-            </a:p>
-          </p:txBody>
-        </p:sp>
-        <p:sp>
-          <p:nvSpPr>
-            <p:cNvPr id="58" name="矩形 57"/>
-            <p:cNvSpPr/>
-            <p:nvPr/>
-          </p:nvSpPr>
-          <p:spPr>
-            <a:xfrm>
-              <a:off x="5503059" y="2680987"/>
-              <a:ext cx="2917372" cy="3470989"/>
-            </a:xfrm>
-            <a:prstGeom prst="rect">
-              <a:avLst/>
-            </a:prstGeom>
-            <a:noFill/>
-            <a:ln w="19050">
-              <a:solidFill>
-                <a:schemeClr val="tx1"/>
-              </a:solidFill>
-              <a:prstDash val="dash"/>
-            </a:ln>
-          </p:spPr>
-          <p:style>
-            <a:lnRef idx="2">
-              <a:schemeClr val="accent1">
-                <a:shade val="50000"/>
-              </a:schemeClr>
-            </a:lnRef>
-            <a:fillRef idx="1">
-              <a:schemeClr val="accent1"/>
-            </a:fillRef>
-            <a:effectRef idx="0">
-              <a:schemeClr val="accent1"/>
-            </a:effectRef>
-            <a:fontRef idx="minor">
-              <a:schemeClr val="lt1"/>
-            </a:fontRef>
-          </p:style>
-          <p:txBody>
-            <a:bodyPr rtlCol="0" anchor="ctr"/>
-            <a:lstStyle/>
-            <a:p>
-              <a:pPr algn="ctr"/>
-              <a:endParaRPr lang="zh-CN" altLang="en-US"/>
-            </a:p>
-          </p:txBody>
-        </p:sp>
-        <p:sp>
-          <p:nvSpPr>
-            <p:cNvPr id="59" name="文本框 58"/>
-            <p:cNvSpPr txBox="1"/>
-            <p:nvPr/>
-          </p:nvSpPr>
-          <p:spPr>
-            <a:xfrm>
-              <a:off x="6253863" y="2759008"/>
-              <a:ext cx="1415772" cy="338554"/>
-            </a:xfrm>
-            <a:prstGeom prst="rect">
-              <a:avLst/>
-            </a:prstGeom>
-            <a:noFill/>
-          </p:spPr>
-          <p:txBody>
-            <a:bodyPr wrap="none" rtlCol="0">
-              <a:spAutoFit/>
-            </a:bodyPr>
-            <a:lstStyle/>
-            <a:p>
-              <a:pPr algn="ctr"/>
-              <a:r>
-                <a:rPr lang="zh-CN" altLang="en-US" sz="1600" b="1" dirty="0" smtClean="0">
-                  <a:solidFill>
-                    <a:schemeClr val="accent1">
-                      <a:lumMod val="50000"/>
-                    </a:schemeClr>
-                  </a:solidFill>
-                </a:rPr>
-                <a:t>子代网络生成</a:t>
-              </a:r>
-              <a:endParaRPr lang="zh-CN" altLang="en-US" sz="1600" b="1" dirty="0">
-                <a:solidFill>
-                  <a:schemeClr val="accent1">
-                    <a:lumMod val="50000"/>
-                  </a:schemeClr>
-                </a:solidFill>
-              </a:endParaRPr>
-            </a:p>
-          </p:txBody>
-        </p:sp>
-        <p:sp>
-          <p:nvSpPr>
-            <p:cNvPr id="60" name="矩形 59"/>
-            <p:cNvSpPr/>
-            <p:nvPr/>
-          </p:nvSpPr>
-          <p:spPr>
-            <a:xfrm>
-              <a:off x="6099220" y="5509365"/>
-              <a:ext cx="1725050" cy="468361"/>
-            </a:xfrm>
-            <a:prstGeom prst="rect">
-              <a:avLst/>
-            </a:prstGeom>
-            <a:noFill/>
-            <a:ln w="19050">
-              <a:solidFill>
-                <a:schemeClr val="tx1"/>
-              </a:solidFill>
-            </a:ln>
-          </p:spPr>
-          <p:style>
-            <a:lnRef idx="2">
-              <a:schemeClr val="accent1">
-                <a:shade val="50000"/>
-              </a:schemeClr>
-            </a:lnRef>
-            <a:fillRef idx="1">
-              <a:schemeClr val="accent1"/>
-            </a:fillRef>
-            <a:effectRef idx="0">
-              <a:schemeClr val="accent1"/>
-            </a:effectRef>
-            <a:fontRef idx="minor">
-              <a:schemeClr val="lt1"/>
-            </a:fontRef>
-          </p:style>
-          <p:txBody>
-            <a:bodyPr rtlCol="0" anchor="ctr"/>
-            <a:lstStyle/>
-            <a:p>
-              <a:pPr algn="ctr"/>
-              <a:r>
-                <a:rPr lang="zh-CN" altLang="en-US" sz="1600" b="1" dirty="0" smtClean="0">
-                  <a:solidFill>
-                    <a:schemeClr val="tx1"/>
-                  </a:solidFill>
-                </a:rPr>
-                <a:t>拟生成的子代</a:t>
-              </a:r>
-              <a:endParaRPr lang="zh-CN" altLang="en-US" sz="1600" b="1" dirty="0">
-                <a:solidFill>
-                  <a:schemeClr val="tx1"/>
-                </a:solidFill>
-              </a:endParaRPr>
-            </a:p>
-          </p:txBody>
-        </p:sp>
-        <p:cxnSp>
-          <p:nvCxnSpPr>
-            <p:cNvPr id="31" name="直接箭头连接符 30"/>
-            <p:cNvCxnSpPr>
-              <a:stCxn id="53" idx="3"/>
-              <a:endCxn id="60" idx="1"/>
-            </p:cNvCxnSpPr>
-            <p:nvPr/>
-          </p:nvCxnSpPr>
-          <p:spPr>
-            <a:xfrm flipV="1">
-              <a:off x="3393230" y="5743546"/>
-              <a:ext cx="2705990" cy="1"/>
-            </a:xfrm>
-            <a:prstGeom prst="straightConnector1">
-              <a:avLst/>
-            </a:prstGeom>
-            <a:ln w="19050">
-              <a:solidFill>
-                <a:schemeClr val="tx1"/>
-              </a:solidFill>
-              <a:tailEnd type="triangle"/>
-            </a:ln>
-          </p:spPr>
-          <p:style>
-            <a:lnRef idx="1">
-              <a:schemeClr val="accent1"/>
-            </a:lnRef>
-            <a:fillRef idx="0">
-              <a:schemeClr val="accent1"/>
-            </a:fillRef>
-            <a:effectRef idx="0">
-              <a:schemeClr val="accent1"/>
-            </a:effectRef>
-            <a:fontRef idx="minor">
-              <a:schemeClr val="tx1"/>
-            </a:fontRef>
-          </p:style>
-        </p:cxnSp>
-        <p:sp>
-          <p:nvSpPr>
-            <p:cNvPr id="32" name="文本框 31"/>
-            <p:cNvSpPr txBox="1"/>
-            <p:nvPr/>
-          </p:nvSpPr>
-          <p:spPr>
-            <a:xfrm>
-              <a:off x="3931774" y="5323692"/>
-              <a:ext cx="1415772" cy="793487"/>
-            </a:xfrm>
-            <a:prstGeom prst="rect">
-              <a:avLst/>
-            </a:prstGeom>
-            <a:noFill/>
-          </p:spPr>
-          <p:txBody>
-            <a:bodyPr wrap="none" rtlCol="0">
-              <a:spAutoFit/>
-            </a:bodyPr>
-            <a:lstStyle/>
-            <a:p>
-              <a:pPr algn="ctr">
-                <a:lnSpc>
-                  <a:spcPct val="150000"/>
-                </a:lnSpc>
-              </a:pPr>
-              <a:r>
-                <a:rPr lang="zh-CN" altLang="en-US" sz="1600" dirty="0" smtClean="0"/>
-                <a:t>网络态射</a:t>
-              </a:r>
-              <a:endParaRPr lang="en-US" altLang="zh-CN" sz="1600" dirty="0" smtClean="0"/>
-            </a:p>
-            <a:p>
-              <a:pPr algn="ctr">
-                <a:lnSpc>
-                  <a:spcPct val="150000"/>
-                </a:lnSpc>
-              </a:pPr>
-              <a:r>
-                <a:rPr lang="zh-CN" altLang="en-US" sz="1600" dirty="0" smtClean="0"/>
-                <a:t>近似网络态射</a:t>
-              </a:r>
-              <a:endParaRPr lang="zh-CN" altLang="en-US" sz="1600" dirty="0"/>
-            </a:p>
-          </p:txBody>
-        </p:sp>
-        <p:sp>
-          <p:nvSpPr>
-            <p:cNvPr id="79" name="矩形 78"/>
-            <p:cNvSpPr/>
-            <p:nvPr/>
-          </p:nvSpPr>
-          <p:spPr>
-            <a:xfrm>
-              <a:off x="6416524" y="4726162"/>
-              <a:ext cx="1090441" cy="388761"/>
-            </a:xfrm>
-            <a:prstGeom prst="rect">
-              <a:avLst/>
-            </a:prstGeom>
-            <a:noFill/>
-            <a:ln w="19050">
-              <a:solidFill>
-                <a:schemeClr val="tx1"/>
-              </a:solidFill>
-            </a:ln>
-          </p:spPr>
-          <p:style>
-            <a:lnRef idx="2">
-              <a:schemeClr val="accent1">
-                <a:shade val="50000"/>
-              </a:schemeClr>
-            </a:lnRef>
-            <a:fillRef idx="1">
-              <a:schemeClr val="accent1"/>
-            </a:fillRef>
-            <a:effectRef idx="0">
-              <a:schemeClr val="accent1"/>
-            </a:effectRef>
-            <a:fontRef idx="minor">
-              <a:schemeClr val="lt1"/>
-            </a:fontRef>
-          </p:style>
-          <p:txBody>
-            <a:bodyPr rtlCol="0" anchor="ctr"/>
-            <a:lstStyle/>
-            <a:p>
-              <a:pPr algn="ctr"/>
-              <a:r>
-                <a:rPr lang="zh-CN" altLang="en-US" sz="1600" b="1" dirty="0" smtClean="0">
-                  <a:solidFill>
-                    <a:schemeClr val="tx1"/>
-                  </a:solidFill>
-                </a:rPr>
-                <a:t>计算时间</a:t>
-              </a:r>
-              <a:endParaRPr lang="zh-CN" altLang="en-US" sz="1600" b="1" dirty="0">
-                <a:solidFill>
-                  <a:schemeClr val="tx1"/>
-                </a:solidFill>
-              </a:endParaRPr>
-            </a:p>
-          </p:txBody>
-        </p:sp>
-        <p:cxnSp>
-          <p:nvCxnSpPr>
-            <p:cNvPr id="80" name="直接箭头连接符 79"/>
-            <p:cNvCxnSpPr>
-              <a:stCxn id="60" idx="0"/>
-              <a:endCxn id="79" idx="2"/>
-            </p:cNvCxnSpPr>
-            <p:nvPr/>
-          </p:nvCxnSpPr>
-          <p:spPr>
-            <a:xfrm flipV="1">
-              <a:off x="6961745" y="5114923"/>
-              <a:ext cx="0" cy="394442"/>
-            </a:xfrm>
-            <a:prstGeom prst="straightConnector1">
-              <a:avLst/>
-            </a:prstGeom>
-            <a:ln w="19050">
-              <a:solidFill>
-                <a:schemeClr val="tx1"/>
-              </a:solidFill>
-              <a:tailEnd type="triangle"/>
-            </a:ln>
-          </p:spPr>
-          <p:style>
-            <a:lnRef idx="1">
-              <a:schemeClr val="accent1"/>
-            </a:lnRef>
-            <a:fillRef idx="0">
-              <a:schemeClr val="accent1"/>
-            </a:fillRef>
-            <a:effectRef idx="0">
-              <a:schemeClr val="accent1"/>
-            </a:effectRef>
-            <a:fontRef idx="minor">
-              <a:schemeClr val="tx1"/>
-            </a:fontRef>
-          </p:style>
-        </p:cxnSp>
-        <p:sp>
-          <p:nvSpPr>
-            <p:cNvPr id="81" name="文本框 80"/>
-            <p:cNvSpPr txBox="1"/>
-            <p:nvPr/>
-          </p:nvSpPr>
-          <p:spPr>
-            <a:xfrm>
-              <a:off x="6961744" y="5145708"/>
-              <a:ext cx="1005403" cy="338554"/>
-            </a:xfrm>
-            <a:prstGeom prst="rect">
-              <a:avLst/>
-            </a:prstGeom>
-            <a:noFill/>
-          </p:spPr>
-          <p:txBody>
-            <a:bodyPr wrap="none" rtlCol="0">
-              <a:spAutoFit/>
-            </a:bodyPr>
-            <a:lstStyle/>
-            <a:p>
-              <a:r>
-                <a:rPr lang="zh-CN" altLang="en-US" sz="1600" dirty="0" smtClean="0"/>
-                <a:t>性能预测</a:t>
-              </a:r>
-              <a:endParaRPr lang="zh-CN" altLang="en-US" sz="1600" dirty="0"/>
-            </a:p>
-          </p:txBody>
-        </p:sp>
-        <p:sp>
-          <p:nvSpPr>
-            <p:cNvPr id="85" name="矩形 84"/>
-            <p:cNvSpPr/>
-            <p:nvPr/>
-          </p:nvSpPr>
-          <p:spPr>
-            <a:xfrm>
-              <a:off x="6416524" y="3976311"/>
-              <a:ext cx="1090441" cy="388761"/>
-            </a:xfrm>
-            <a:prstGeom prst="rect">
-              <a:avLst/>
-            </a:prstGeom>
-            <a:noFill/>
-            <a:ln w="19050">
-              <a:solidFill>
-                <a:schemeClr val="tx1"/>
-              </a:solidFill>
-            </a:ln>
-          </p:spPr>
-          <p:style>
-            <a:lnRef idx="2">
-              <a:schemeClr val="accent1">
-                <a:shade val="50000"/>
-              </a:schemeClr>
-            </a:lnRef>
-            <a:fillRef idx="1">
-              <a:schemeClr val="accent1"/>
-            </a:fillRef>
-            <a:effectRef idx="0">
-              <a:schemeClr val="accent1"/>
-            </a:effectRef>
-            <a:fontRef idx="minor">
-              <a:schemeClr val="lt1"/>
-            </a:fontRef>
-          </p:style>
-          <p:txBody>
-            <a:bodyPr rtlCol="0" anchor="ctr"/>
-            <a:lstStyle/>
-            <a:p>
-              <a:pPr algn="ctr"/>
-              <a:r>
-                <a:rPr lang="zh-CN" altLang="en-US" sz="1600" b="1" dirty="0">
-                  <a:solidFill>
-                    <a:schemeClr val="tx1"/>
-                  </a:solidFill>
-                </a:rPr>
-                <a:t>子代</a:t>
-              </a:r>
-              <a:r>
-                <a:rPr lang="zh-CN" altLang="en-US" sz="1600" b="1" dirty="0" smtClean="0">
-                  <a:solidFill>
-                    <a:schemeClr val="tx1"/>
-                  </a:solidFill>
-                </a:rPr>
-                <a:t>分布</a:t>
-              </a:r>
-              <a:endParaRPr lang="zh-CN" altLang="en-US" sz="1600" b="1" dirty="0">
-                <a:solidFill>
-                  <a:schemeClr val="tx1"/>
-                </a:solidFill>
-              </a:endParaRPr>
-            </a:p>
-          </p:txBody>
-        </p:sp>
-        <p:sp>
-          <p:nvSpPr>
-            <p:cNvPr id="86" name="文本框 85"/>
-            <p:cNvSpPr txBox="1"/>
-            <p:nvPr/>
-          </p:nvSpPr>
-          <p:spPr>
-            <a:xfrm>
-              <a:off x="6963396" y="4372216"/>
-              <a:ext cx="1202573" cy="338554"/>
-            </a:xfrm>
-            <a:prstGeom prst="rect">
-              <a:avLst/>
-            </a:prstGeom>
-            <a:noFill/>
-          </p:spPr>
-          <p:txBody>
-            <a:bodyPr wrap="none" rtlCol="0">
-              <a:spAutoFit/>
-            </a:bodyPr>
-            <a:lstStyle/>
-            <a:p>
-              <a:pPr algn="ctr"/>
-              <a:r>
-                <a:rPr lang="zh-CN" altLang="en-US" sz="1600" dirty="0" smtClean="0"/>
-                <a:t>核密度估计</a:t>
-              </a:r>
-              <a:endParaRPr lang="zh-CN" altLang="en-US" sz="1600" dirty="0"/>
-            </a:p>
-          </p:txBody>
-        </p:sp>
-        <p:cxnSp>
-          <p:nvCxnSpPr>
-            <p:cNvPr id="87" name="直接箭头连接符 86"/>
-            <p:cNvCxnSpPr>
-              <a:stCxn id="79" idx="0"/>
-              <a:endCxn id="85" idx="2"/>
-            </p:cNvCxnSpPr>
-            <p:nvPr/>
-          </p:nvCxnSpPr>
-          <p:spPr>
-            <a:xfrm flipV="1">
-              <a:off x="6961745" y="4365072"/>
-              <a:ext cx="0" cy="361090"/>
-            </a:xfrm>
-            <a:prstGeom prst="straightConnector1">
-              <a:avLst/>
-            </a:prstGeom>
-            <a:ln w="19050">
-              <a:solidFill>
-                <a:schemeClr val="tx1"/>
-              </a:solidFill>
-              <a:tailEnd type="triangle"/>
-            </a:ln>
-          </p:spPr>
-          <p:style>
-            <a:lnRef idx="1">
-              <a:schemeClr val="accent1"/>
-            </a:lnRef>
-            <a:fillRef idx="0">
-              <a:schemeClr val="accent1"/>
-            </a:fillRef>
-            <a:effectRef idx="0">
-              <a:schemeClr val="accent1"/>
-            </a:effectRef>
-            <a:fontRef idx="minor">
-              <a:schemeClr val="tx1"/>
-            </a:fontRef>
-          </p:style>
-        </p:cxnSp>
-        <p:sp>
-          <p:nvSpPr>
-            <p:cNvPr id="88" name="矩形 87"/>
-            <p:cNvSpPr/>
-            <p:nvPr/>
-          </p:nvSpPr>
-          <p:spPr>
-            <a:xfrm>
-              <a:off x="6006911" y="3122665"/>
-              <a:ext cx="1909666" cy="468361"/>
-            </a:xfrm>
-            <a:prstGeom prst="rect">
-              <a:avLst/>
-            </a:prstGeom>
-            <a:noFill/>
-            <a:ln w="19050">
-              <a:solidFill>
-                <a:schemeClr val="tx1"/>
-              </a:solidFill>
-            </a:ln>
-          </p:spPr>
-          <p:style>
-            <a:lnRef idx="2">
-              <a:schemeClr val="accent1">
-                <a:shade val="50000"/>
-              </a:schemeClr>
-            </a:lnRef>
-            <a:fillRef idx="1">
-              <a:schemeClr val="accent1"/>
-            </a:fillRef>
-            <a:effectRef idx="0">
-              <a:schemeClr val="accent1"/>
-            </a:effectRef>
-            <a:fontRef idx="minor">
-              <a:schemeClr val="lt1"/>
-            </a:fontRef>
-          </p:style>
-          <p:txBody>
-            <a:bodyPr rtlCol="0" anchor="ctr"/>
-            <a:lstStyle/>
-            <a:p>
-              <a:pPr algn="ctr"/>
-              <a:r>
-                <a:rPr lang="zh-CN" altLang="en-US" sz="1600" b="1" dirty="0" smtClean="0">
-                  <a:solidFill>
-                    <a:schemeClr val="tx1"/>
-                  </a:solidFill>
-                </a:rPr>
-                <a:t>低密度区域的子代</a:t>
-              </a:r>
-              <a:endParaRPr lang="zh-CN" altLang="en-US" sz="1600" b="1" dirty="0">
-                <a:solidFill>
-                  <a:schemeClr val="tx1"/>
-                </a:solidFill>
-              </a:endParaRPr>
-            </a:p>
-          </p:txBody>
-        </p:sp>
-        <p:cxnSp>
-          <p:nvCxnSpPr>
-            <p:cNvPr id="89" name="直接箭头连接符 88"/>
-            <p:cNvCxnSpPr>
-              <a:stCxn id="85" idx="0"/>
-              <a:endCxn id="88" idx="2"/>
-            </p:cNvCxnSpPr>
-            <p:nvPr/>
-          </p:nvCxnSpPr>
-          <p:spPr>
-            <a:xfrm flipH="1" flipV="1">
-              <a:off x="6961744" y="3591026"/>
-              <a:ext cx="1" cy="385285"/>
-            </a:xfrm>
-            <a:prstGeom prst="straightConnector1">
-              <a:avLst/>
-            </a:prstGeom>
-            <a:ln w="19050">
-              <a:solidFill>
-                <a:schemeClr val="tx1"/>
-              </a:solidFill>
-              <a:tailEnd type="triangle"/>
-            </a:ln>
-          </p:spPr>
-          <p:style>
-            <a:lnRef idx="1">
-              <a:schemeClr val="accent1"/>
-            </a:lnRef>
-            <a:fillRef idx="0">
-              <a:schemeClr val="accent1"/>
-            </a:fillRef>
-            <a:effectRef idx="0">
-              <a:schemeClr val="accent1"/>
-            </a:effectRef>
-            <a:fontRef idx="minor">
-              <a:schemeClr val="tx1"/>
-            </a:fontRef>
-          </p:style>
-        </p:cxnSp>
-        <p:sp>
-          <p:nvSpPr>
-            <p:cNvPr id="90" name="文本框 89"/>
-            <p:cNvSpPr txBox="1"/>
-            <p:nvPr/>
-          </p:nvSpPr>
-          <p:spPr>
-            <a:xfrm>
-              <a:off x="6969646" y="3609474"/>
-              <a:ext cx="595036" cy="338554"/>
-            </a:xfrm>
-            <a:prstGeom prst="rect">
-              <a:avLst/>
-            </a:prstGeom>
-            <a:noFill/>
-          </p:spPr>
-          <p:txBody>
-            <a:bodyPr wrap="none" rtlCol="0">
-              <a:spAutoFit/>
-            </a:bodyPr>
-            <a:lstStyle/>
-            <a:p>
-              <a:pPr algn="ctr"/>
-              <a:r>
-                <a:rPr lang="zh-CN" altLang="en-US" sz="1600" dirty="0" smtClean="0"/>
-                <a:t>采样</a:t>
-              </a:r>
-              <a:endParaRPr lang="zh-CN" altLang="en-US" sz="1600" dirty="0"/>
-            </a:p>
-          </p:txBody>
-        </p:sp>
-        <p:cxnSp>
-          <p:nvCxnSpPr>
-            <p:cNvPr id="91" name="直接箭头连接符 90"/>
-            <p:cNvCxnSpPr>
-              <a:stCxn id="88" idx="1"/>
-              <a:endCxn id="27" idx="3"/>
-            </p:cNvCxnSpPr>
-            <p:nvPr/>
-          </p:nvCxnSpPr>
-          <p:spPr>
-            <a:xfrm flipH="1">
-              <a:off x="2983619" y="3356846"/>
-              <a:ext cx="3023292" cy="24664"/>
-            </a:xfrm>
-            <a:prstGeom prst="straightConnector1">
-              <a:avLst/>
-            </a:prstGeom>
-            <a:ln w="19050">
-              <a:solidFill>
-                <a:schemeClr val="tx1"/>
-              </a:solidFill>
-              <a:tailEnd type="triangle"/>
-            </a:ln>
-          </p:spPr>
-          <p:style>
-            <a:lnRef idx="1">
-              <a:schemeClr val="accent1"/>
-            </a:lnRef>
-            <a:fillRef idx="0">
-              <a:schemeClr val="accent1"/>
-            </a:fillRef>
-            <a:effectRef idx="0">
-              <a:schemeClr val="accent1"/>
-            </a:effectRef>
-            <a:fontRef idx="minor">
-              <a:schemeClr val="tx1"/>
-            </a:fontRef>
-          </p:style>
-        </p:cxnSp>
-        <p:sp>
-          <p:nvSpPr>
-            <p:cNvPr id="50" name="文本框 49"/>
-            <p:cNvSpPr txBox="1"/>
-            <p:nvPr/>
-          </p:nvSpPr>
-          <p:spPr>
-            <a:xfrm>
-              <a:off x="3964788" y="2747179"/>
-              <a:ext cx="1488233" cy="584775"/>
-            </a:xfrm>
-            <a:prstGeom prst="rect">
-              <a:avLst/>
-            </a:prstGeom>
-            <a:noFill/>
-          </p:spPr>
-          <p:txBody>
-            <a:bodyPr wrap="square" rtlCol="0">
-              <a:spAutoFit/>
-            </a:bodyPr>
-            <a:lstStyle/>
-            <a:p>
-              <a:r>
-                <a:rPr lang="zh-CN" altLang="en-US" sz="1600" dirty="0" smtClean="0"/>
-                <a:t>训练、评估预测精度</a:t>
-              </a:r>
-              <a:endParaRPr lang="zh-CN" altLang="en-US" sz="1600" dirty="0"/>
-            </a:p>
-          </p:txBody>
-        </p:sp>
-        <p:sp>
-          <p:nvSpPr>
-            <p:cNvPr id="51" name="文本框 50"/>
-            <p:cNvSpPr txBox="1"/>
-            <p:nvPr/>
-          </p:nvSpPr>
-          <p:spPr>
-            <a:xfrm>
-              <a:off x="3898425" y="3398457"/>
-              <a:ext cx="1620957" cy="338554"/>
-            </a:xfrm>
-            <a:prstGeom prst="rect">
-              <a:avLst/>
-            </a:prstGeom>
-            <a:noFill/>
-          </p:spPr>
-          <p:txBody>
-            <a:bodyPr wrap="none" rtlCol="0">
-              <a:spAutoFit/>
-            </a:bodyPr>
-            <a:lstStyle/>
-            <a:p>
-              <a:r>
-                <a:rPr lang="zh-CN" altLang="en-US" sz="1600" dirty="0" smtClean="0"/>
-                <a:t>计算帕累托前沿</a:t>
-              </a:r>
-              <a:endParaRPr lang="zh-CN" altLang="en-US" sz="1600" dirty="0"/>
-            </a:p>
-          </p:txBody>
-        </p:sp>
-        <p:sp>
-          <p:nvSpPr>
-            <p:cNvPr id="92" name="文本框 91"/>
-            <p:cNvSpPr txBox="1"/>
-            <p:nvPr/>
-          </p:nvSpPr>
-          <p:spPr>
-            <a:xfrm>
-              <a:off x="4095237" y="2412766"/>
-              <a:ext cx="1005403" cy="338554"/>
-            </a:xfrm>
-            <a:prstGeom prst="rect">
-              <a:avLst/>
-            </a:prstGeom>
-            <a:noFill/>
-          </p:spPr>
-          <p:txBody>
-            <a:bodyPr wrap="none" rtlCol="0">
-              <a:spAutoFit/>
-            </a:bodyPr>
-            <a:lstStyle/>
-            <a:p>
-              <a:pPr algn="ctr"/>
-              <a:r>
-                <a:rPr lang="zh-CN" altLang="en-US" sz="1600" b="1" dirty="0" smtClean="0">
-                  <a:solidFill>
-                    <a:schemeClr val="accent1">
-                      <a:lumMod val="50000"/>
-                    </a:schemeClr>
-                  </a:solidFill>
-                </a:rPr>
-                <a:t>种群更新</a:t>
-              </a:r>
-              <a:endParaRPr lang="zh-CN" altLang="en-US" sz="1600" b="1" dirty="0">
-                <a:solidFill>
-                  <a:schemeClr val="accent1">
-                    <a:lumMod val="50000"/>
-                  </a:schemeClr>
-                </a:solidFill>
-              </a:endParaRPr>
-            </a:p>
-          </p:txBody>
-        </p:sp>
-        <p:sp>
-          <p:nvSpPr>
-            <p:cNvPr id="94" name="文本框 93"/>
-            <p:cNvSpPr txBox="1"/>
-            <p:nvPr/>
-          </p:nvSpPr>
-          <p:spPr>
-            <a:xfrm>
-              <a:off x="4133542" y="5059111"/>
-              <a:ext cx="1005403" cy="338554"/>
-            </a:xfrm>
-            <a:prstGeom prst="rect">
-              <a:avLst/>
-            </a:prstGeom>
-            <a:noFill/>
-          </p:spPr>
-          <p:txBody>
-            <a:bodyPr wrap="none" rtlCol="0">
-              <a:spAutoFit/>
-            </a:bodyPr>
-            <a:lstStyle/>
-            <a:p>
-              <a:pPr algn="ctr"/>
-              <a:r>
-                <a:rPr lang="zh-CN" altLang="en-US" sz="1600" b="1" dirty="0" smtClean="0">
-                  <a:solidFill>
-                    <a:schemeClr val="accent1">
-                      <a:lumMod val="50000"/>
-                    </a:schemeClr>
-                  </a:solidFill>
-                </a:rPr>
-                <a:t>种群突变</a:t>
-              </a:r>
-              <a:endParaRPr lang="zh-CN" altLang="en-US" sz="1600" b="1" dirty="0">
-                <a:solidFill>
-                  <a:schemeClr val="accent1">
-                    <a:lumMod val="50000"/>
-                  </a:schemeClr>
-                </a:solidFill>
-              </a:endParaRPr>
-            </a:p>
-          </p:txBody>
-        </p:sp>
-      </p:grpSp>
+            </a:solidFill>
+          </a:ln>
+        </p:spPr>
+        <p:style>
+          <a:lnRef idx="2">
+            <a:schemeClr val="accent1">
+              <a:shade val="50000"/>
+            </a:schemeClr>
+          </a:lnRef>
+          <a:fillRef idx="1">
+            <a:schemeClr val="accent1"/>
+          </a:fillRef>
+          <a:effectRef idx="0">
+            <a:schemeClr val="accent1"/>
+          </a:effectRef>
+          <a:fontRef idx="minor">
+            <a:schemeClr val="lt1"/>
+          </a:fontRef>
+        </p:style>
+        <p:txBody>
+          <a:bodyPr rtlCol="0" anchor="ctr"/>
+          <a:lstStyle/>
+          <a:p>
+            <a:pPr algn="ctr"/>
+            <a:endParaRPr lang="zh-CN" altLang="en-US">
+              <a:latin typeface="Times New Roman" panose="02020603050405020304" pitchFamily="18" charset="0"/>
+              <a:ea typeface="宋体" panose="02010600030101010101" pitchFamily="2" charset="-122"/>
+              <a:cs typeface="Times New Roman" panose="02020603050405020304" pitchFamily="18" charset="0"/>
+            </a:endParaRPr>
+          </a:p>
+        </p:txBody>
+      </p:sp>
+      <p:sp>
+        <p:nvSpPr>
+          <p:cNvPr id="41" name="文本框 40"/>
+          <p:cNvSpPr txBox="1"/>
+          <p:nvPr/>
+        </p:nvSpPr>
+        <p:spPr>
+          <a:xfrm>
+            <a:off x="7230108" y="3064696"/>
+            <a:ext cx="346249" cy="361637"/>
+          </a:xfrm>
+          <a:prstGeom prst="rect">
+            <a:avLst/>
+          </a:prstGeom>
+          <a:noFill/>
+        </p:spPr>
+        <p:txBody>
+          <a:bodyPr vert="eaVert" wrap="none" rtlCol="0">
+            <a:spAutoFit/>
+          </a:bodyPr>
+          <a:lstStyle/>
+          <a:p>
+            <a:r>
+              <a:rPr lang="en-AE" altLang="zh-CN" sz="1050" b="1" dirty="0" smtClean="0">
+                <a:latin typeface="Times New Roman" panose="02020603050405020304" pitchFamily="18" charset="0"/>
+                <a:ea typeface="宋体" panose="02010600030101010101" pitchFamily="2" charset="-122"/>
+                <a:cs typeface="Times New Roman" panose="02020603050405020304" pitchFamily="18" charset="0"/>
+              </a:rPr>
+              <a:t>……</a:t>
+            </a:r>
+            <a:endParaRPr lang="zh-CN" altLang="en-US" sz="1050" b="1" dirty="0">
+              <a:latin typeface="Times New Roman" panose="02020603050405020304" pitchFamily="18" charset="0"/>
+              <a:ea typeface="宋体" panose="02010600030101010101" pitchFamily="2" charset="-122"/>
+              <a:cs typeface="Times New Roman" panose="02020603050405020304" pitchFamily="18" charset="0"/>
+            </a:endParaRPr>
+          </a:p>
+        </p:txBody>
+      </p:sp>
     </p:spTree>
     <p:extLst>
       <p:ext uri="{BB962C8B-B14F-4D97-AF65-F5344CB8AC3E}">
-        <p14:creationId xmlns:p14="http://schemas.microsoft.com/office/powerpoint/2010/main" val="1965133645"/>
+        <p14:creationId xmlns:p14="http://schemas.microsoft.com/office/powerpoint/2010/main" val="2973154240"/>
       </p:ext>
     </p:extLst>
   </p:cSld>
   <p:clrMapOvr>
     <a:masterClrMapping/>
   </p:clrMapOvr>
-  <p:timing>
-    <p:tnLst>
-      <p:par>
-        <p:cTn id="1" dur="indefinite" restart="never" nodeType="tmRoot"/>
-      </p:par>
-    </p:tnLst>
-  </p:timing>
 </p:sld>
 </file>
 

--- a/figure/科研.pptx
+++ b/figure/科研.pptx
@@ -212,7 +212,7 @@
           <a:p>
             <a:fld id="{B2743333-EF98-4F3C-95C6-7F4B81769F11}" type="datetimeFigureOut">
               <a:rPr lang="zh-CN" altLang="en-US" smtClean="0"/>
-              <a:t>2023/12/8</a:t>
+              <a:t>2023/12/10</a:t>
             </a:fld>
             <a:endParaRPr lang="zh-CN" altLang="en-US"/>
           </a:p>
@@ -779,7 +779,7 @@
           <a:p>
             <a:fld id="{7FB516F4-0452-4179-9B91-2B7430FA9247}" type="datetimeFigureOut">
               <a:rPr lang="zh-CN" altLang="en-US" smtClean="0"/>
-              <a:t>2023/12/8</a:t>
+              <a:t>2023/12/10</a:t>
             </a:fld>
             <a:endParaRPr lang="zh-CN" altLang="en-US"/>
           </a:p>
@@ -949,7 +949,7 @@
           <a:p>
             <a:fld id="{7FB516F4-0452-4179-9B91-2B7430FA9247}" type="datetimeFigureOut">
               <a:rPr lang="zh-CN" altLang="en-US" smtClean="0"/>
-              <a:t>2023/12/8</a:t>
+              <a:t>2023/12/10</a:t>
             </a:fld>
             <a:endParaRPr lang="zh-CN" altLang="en-US"/>
           </a:p>
@@ -1129,7 +1129,7 @@
           <a:p>
             <a:fld id="{7FB516F4-0452-4179-9B91-2B7430FA9247}" type="datetimeFigureOut">
               <a:rPr lang="zh-CN" altLang="en-US" smtClean="0"/>
-              <a:t>2023/12/8</a:t>
+              <a:t>2023/12/10</a:t>
             </a:fld>
             <a:endParaRPr lang="zh-CN" altLang="en-US"/>
           </a:p>
@@ -1299,7 +1299,7 @@
           <a:p>
             <a:fld id="{7FB516F4-0452-4179-9B91-2B7430FA9247}" type="datetimeFigureOut">
               <a:rPr lang="zh-CN" altLang="en-US" smtClean="0"/>
-              <a:t>2023/12/8</a:t>
+              <a:t>2023/12/10</a:t>
             </a:fld>
             <a:endParaRPr lang="zh-CN" altLang="en-US"/>
           </a:p>
@@ -1545,7 +1545,7 @@
           <a:p>
             <a:fld id="{7FB516F4-0452-4179-9B91-2B7430FA9247}" type="datetimeFigureOut">
               <a:rPr lang="zh-CN" altLang="en-US" smtClean="0"/>
-              <a:t>2023/12/8</a:t>
+              <a:t>2023/12/10</a:t>
             </a:fld>
             <a:endParaRPr lang="zh-CN" altLang="en-US"/>
           </a:p>
@@ -1777,7 +1777,7 @@
           <a:p>
             <a:fld id="{7FB516F4-0452-4179-9B91-2B7430FA9247}" type="datetimeFigureOut">
               <a:rPr lang="zh-CN" altLang="en-US" smtClean="0"/>
-              <a:t>2023/12/8</a:t>
+              <a:t>2023/12/10</a:t>
             </a:fld>
             <a:endParaRPr lang="zh-CN" altLang="en-US"/>
           </a:p>
@@ -2144,7 +2144,7 @@
           <a:p>
             <a:fld id="{7FB516F4-0452-4179-9B91-2B7430FA9247}" type="datetimeFigureOut">
               <a:rPr lang="zh-CN" altLang="en-US" smtClean="0"/>
-              <a:t>2023/12/8</a:t>
+              <a:t>2023/12/10</a:t>
             </a:fld>
             <a:endParaRPr lang="zh-CN" altLang="en-US"/>
           </a:p>
@@ -2262,7 +2262,7 @@
           <a:p>
             <a:fld id="{7FB516F4-0452-4179-9B91-2B7430FA9247}" type="datetimeFigureOut">
               <a:rPr lang="zh-CN" altLang="en-US" smtClean="0"/>
-              <a:t>2023/12/8</a:t>
+              <a:t>2023/12/10</a:t>
             </a:fld>
             <a:endParaRPr lang="zh-CN" altLang="en-US"/>
           </a:p>
@@ -2357,7 +2357,7 @@
           <a:p>
             <a:fld id="{7FB516F4-0452-4179-9B91-2B7430FA9247}" type="datetimeFigureOut">
               <a:rPr lang="zh-CN" altLang="en-US" smtClean="0"/>
-              <a:t>2023/12/8</a:t>
+              <a:t>2023/12/10</a:t>
             </a:fld>
             <a:endParaRPr lang="zh-CN" altLang="en-US"/>
           </a:p>
@@ -2634,7 +2634,7 @@
           <a:p>
             <a:fld id="{7FB516F4-0452-4179-9B91-2B7430FA9247}" type="datetimeFigureOut">
               <a:rPr lang="zh-CN" altLang="en-US" smtClean="0"/>
-              <a:t>2023/12/8</a:t>
+              <a:t>2023/12/10</a:t>
             </a:fld>
             <a:endParaRPr lang="zh-CN" altLang="en-US"/>
           </a:p>
@@ -2887,7 +2887,7 @@
           <a:p>
             <a:fld id="{7FB516F4-0452-4179-9B91-2B7430FA9247}" type="datetimeFigureOut">
               <a:rPr lang="zh-CN" altLang="en-US" smtClean="0"/>
-              <a:t>2023/12/8</a:t>
+              <a:t>2023/12/10</a:t>
             </a:fld>
             <a:endParaRPr lang="zh-CN" altLang="en-US"/>
           </a:p>
@@ -3100,7 +3100,7 @@
           <a:p>
             <a:fld id="{7FB516F4-0452-4179-9B91-2B7430FA9247}" type="datetimeFigureOut">
               <a:rPr lang="zh-CN" altLang="en-US" smtClean="0"/>
-              <a:t>2023/12/8</a:t>
+              <a:t>2023/12/10</a:t>
             </a:fld>
             <a:endParaRPr lang="zh-CN" altLang="en-US"/>
           </a:p>
@@ -26081,7 +26081,7 @@
           <a:graphicData uri="http://schemas.openxmlformats.org/presentationml/2006/ole">
             <mc:AlternateContent xmlns:mc="http://schemas.openxmlformats.org/markup-compatibility/2006">
               <mc:Choice xmlns:v="urn:schemas-microsoft-com:vml" Requires="v">
-                <p:oleObj spid="_x0000_s1032" name="AxMath" r:id="rId3" imgW="315000" imgH="228600" progId="Equation.AxMath">
+                <p:oleObj spid="_x0000_s1035" name="AxMath" r:id="rId3" imgW="315000" imgH="228600" progId="Equation.AxMath">
                   <p:embed/>
                 </p:oleObj>
               </mc:Choice>
@@ -26138,7 +26138,7 @@
           <a:graphicData uri="http://schemas.openxmlformats.org/presentationml/2006/ole">
             <mc:AlternateContent xmlns:mc="http://schemas.openxmlformats.org/markup-compatibility/2006">
               <mc:Choice xmlns:v="urn:schemas-microsoft-com:vml" Requires="v">
-                <p:oleObj spid="_x0000_s1033" name="AxMath" r:id="rId5" imgW="347760" imgH="228600" progId="Equation.AxMath">
+                <p:oleObj spid="_x0000_s1036" name="AxMath" r:id="rId5" imgW="347760" imgH="228600" progId="Equation.AxMath">
                   <p:embed/>
                 </p:oleObj>
               </mc:Choice>
@@ -26195,7 +26195,7 @@
           <a:graphicData uri="http://schemas.openxmlformats.org/presentationml/2006/ole">
             <mc:AlternateContent xmlns:mc="http://schemas.openxmlformats.org/markup-compatibility/2006">
               <mc:Choice xmlns:v="urn:schemas-microsoft-com:vml" Requires="v">
-                <p:oleObj spid="_x0000_s1034" name="AxMath" r:id="rId7" imgW="378000" imgH="228600" progId="Equation.AxMath">
+                <p:oleObj spid="_x0000_s1037" name="AxMath" r:id="rId7" imgW="378000" imgH="228600" progId="Equation.AxMath">
                   <p:embed/>
                 </p:oleObj>
               </mc:Choice>

--- a/figure/科研.pptx
+++ b/figure/科研.pptx
@@ -212,7 +212,7 @@
           <a:p>
             <a:fld id="{B2743333-EF98-4F3C-95C6-7F4B81769F11}" type="datetimeFigureOut">
               <a:rPr lang="zh-CN" altLang="en-US" smtClean="0"/>
-              <a:t>2023/12/10</a:t>
+              <a:t>2023/12/12</a:t>
             </a:fld>
             <a:endParaRPr lang="zh-CN" altLang="en-US"/>
           </a:p>
@@ -779,7 +779,7 @@
           <a:p>
             <a:fld id="{7FB516F4-0452-4179-9B91-2B7430FA9247}" type="datetimeFigureOut">
               <a:rPr lang="zh-CN" altLang="en-US" smtClean="0"/>
-              <a:t>2023/12/10</a:t>
+              <a:t>2023/12/12</a:t>
             </a:fld>
             <a:endParaRPr lang="zh-CN" altLang="en-US"/>
           </a:p>
@@ -949,7 +949,7 @@
           <a:p>
             <a:fld id="{7FB516F4-0452-4179-9B91-2B7430FA9247}" type="datetimeFigureOut">
               <a:rPr lang="zh-CN" altLang="en-US" smtClean="0"/>
-              <a:t>2023/12/10</a:t>
+              <a:t>2023/12/12</a:t>
             </a:fld>
             <a:endParaRPr lang="zh-CN" altLang="en-US"/>
           </a:p>
@@ -1129,7 +1129,7 @@
           <a:p>
             <a:fld id="{7FB516F4-0452-4179-9B91-2B7430FA9247}" type="datetimeFigureOut">
               <a:rPr lang="zh-CN" altLang="en-US" smtClean="0"/>
-              <a:t>2023/12/10</a:t>
+              <a:t>2023/12/12</a:t>
             </a:fld>
             <a:endParaRPr lang="zh-CN" altLang="en-US"/>
           </a:p>
@@ -1299,7 +1299,7 @@
           <a:p>
             <a:fld id="{7FB516F4-0452-4179-9B91-2B7430FA9247}" type="datetimeFigureOut">
               <a:rPr lang="zh-CN" altLang="en-US" smtClean="0"/>
-              <a:t>2023/12/10</a:t>
+              <a:t>2023/12/12</a:t>
             </a:fld>
             <a:endParaRPr lang="zh-CN" altLang="en-US"/>
           </a:p>
@@ -1545,7 +1545,7 @@
           <a:p>
             <a:fld id="{7FB516F4-0452-4179-9B91-2B7430FA9247}" type="datetimeFigureOut">
               <a:rPr lang="zh-CN" altLang="en-US" smtClean="0"/>
-              <a:t>2023/12/10</a:t>
+              <a:t>2023/12/12</a:t>
             </a:fld>
             <a:endParaRPr lang="zh-CN" altLang="en-US"/>
           </a:p>
@@ -1777,7 +1777,7 @@
           <a:p>
             <a:fld id="{7FB516F4-0452-4179-9B91-2B7430FA9247}" type="datetimeFigureOut">
               <a:rPr lang="zh-CN" altLang="en-US" smtClean="0"/>
-              <a:t>2023/12/10</a:t>
+              <a:t>2023/12/12</a:t>
             </a:fld>
             <a:endParaRPr lang="zh-CN" altLang="en-US"/>
           </a:p>
@@ -2144,7 +2144,7 @@
           <a:p>
             <a:fld id="{7FB516F4-0452-4179-9B91-2B7430FA9247}" type="datetimeFigureOut">
               <a:rPr lang="zh-CN" altLang="en-US" smtClean="0"/>
-              <a:t>2023/12/10</a:t>
+              <a:t>2023/12/12</a:t>
             </a:fld>
             <a:endParaRPr lang="zh-CN" altLang="en-US"/>
           </a:p>
@@ -2262,7 +2262,7 @@
           <a:p>
             <a:fld id="{7FB516F4-0452-4179-9B91-2B7430FA9247}" type="datetimeFigureOut">
               <a:rPr lang="zh-CN" altLang="en-US" smtClean="0"/>
-              <a:t>2023/12/10</a:t>
+              <a:t>2023/12/12</a:t>
             </a:fld>
             <a:endParaRPr lang="zh-CN" altLang="en-US"/>
           </a:p>
@@ -2357,7 +2357,7 @@
           <a:p>
             <a:fld id="{7FB516F4-0452-4179-9B91-2B7430FA9247}" type="datetimeFigureOut">
               <a:rPr lang="zh-CN" altLang="en-US" smtClean="0"/>
-              <a:t>2023/12/10</a:t>
+              <a:t>2023/12/12</a:t>
             </a:fld>
             <a:endParaRPr lang="zh-CN" altLang="en-US"/>
           </a:p>
@@ -2634,7 +2634,7 @@
           <a:p>
             <a:fld id="{7FB516F4-0452-4179-9B91-2B7430FA9247}" type="datetimeFigureOut">
               <a:rPr lang="zh-CN" altLang="en-US" smtClean="0"/>
-              <a:t>2023/12/10</a:t>
+              <a:t>2023/12/12</a:t>
             </a:fld>
             <a:endParaRPr lang="zh-CN" altLang="en-US"/>
           </a:p>
@@ -2887,7 +2887,7 @@
           <a:p>
             <a:fld id="{7FB516F4-0452-4179-9B91-2B7430FA9247}" type="datetimeFigureOut">
               <a:rPr lang="zh-CN" altLang="en-US" smtClean="0"/>
-              <a:t>2023/12/10</a:t>
+              <a:t>2023/12/12</a:t>
             </a:fld>
             <a:endParaRPr lang="zh-CN" altLang="en-US"/>
           </a:p>
@@ -3100,7 +3100,7 @@
           <a:p>
             <a:fld id="{7FB516F4-0452-4179-9B91-2B7430FA9247}" type="datetimeFigureOut">
               <a:rPr lang="zh-CN" altLang="en-US" smtClean="0"/>
-              <a:t>2023/12/10</a:t>
+              <a:t>2023/12/12</a:t>
             </a:fld>
             <a:endParaRPr lang="zh-CN" altLang="en-US"/>
           </a:p>
@@ -26081,7 +26081,7 @@
           <a:graphicData uri="http://schemas.openxmlformats.org/presentationml/2006/ole">
             <mc:AlternateContent xmlns:mc="http://schemas.openxmlformats.org/markup-compatibility/2006">
               <mc:Choice xmlns:v="urn:schemas-microsoft-com:vml" Requires="v">
-                <p:oleObj spid="_x0000_s1035" name="AxMath" r:id="rId3" imgW="315000" imgH="228600" progId="Equation.AxMath">
+                <p:oleObj spid="_x0000_s1038" name="AxMath" r:id="rId3" imgW="315000" imgH="228600" progId="Equation.AxMath">
                   <p:embed/>
                 </p:oleObj>
               </mc:Choice>
@@ -26138,7 +26138,7 @@
           <a:graphicData uri="http://schemas.openxmlformats.org/presentationml/2006/ole">
             <mc:AlternateContent xmlns:mc="http://schemas.openxmlformats.org/markup-compatibility/2006">
               <mc:Choice xmlns:v="urn:schemas-microsoft-com:vml" Requires="v">
-                <p:oleObj spid="_x0000_s1036" name="AxMath" r:id="rId5" imgW="347760" imgH="228600" progId="Equation.AxMath">
+                <p:oleObj spid="_x0000_s1039" name="AxMath" r:id="rId5" imgW="347760" imgH="228600" progId="Equation.AxMath">
                   <p:embed/>
                 </p:oleObj>
               </mc:Choice>
@@ -26195,7 +26195,7 @@
           <a:graphicData uri="http://schemas.openxmlformats.org/presentationml/2006/ole">
             <mc:AlternateContent xmlns:mc="http://schemas.openxmlformats.org/markup-compatibility/2006">
               <mc:Choice xmlns:v="urn:schemas-microsoft-com:vml" Requires="v">
-                <p:oleObj spid="_x0000_s1037" name="AxMath" r:id="rId7" imgW="378000" imgH="228600" progId="Equation.AxMath">
+                <p:oleObj spid="_x0000_s1040" name="AxMath" r:id="rId7" imgW="378000" imgH="228600" progId="Equation.AxMath">
                   <p:embed/>
                 </p:oleObj>
               </mc:Choice>
